--- a/3_WeAreHereForPizza_Następny_przystanek_toaleta.pptx
+++ b/3_WeAreHereForPizza_Następny_przystanek_toaleta.pptx
@@ -3003,7 +3003,7 @@
   <p:cSld>
     <p:spTree>
       <p:nvGrpSpPr>
-        <p:cNvPr id="74" name="Shape 74"/>
+        <p:cNvPr id="75" name="Shape 75"/>
         <p:cNvGrpSpPr/>
         <p:nvPr/>
       </p:nvGrpSpPr>
@@ -3017,7 +3017,7 @@
       </p:grpSpPr>
       <p:sp>
         <p:nvSpPr>
-          <p:cNvPr id="75" name="Google Shape;75;p5:notes"/>
+          <p:cNvPr id="76" name="Google Shape;76;p5:notes"/>
           <p:cNvSpPr/>
           <p:nvPr>
             <p:ph idx="2" type="sldImg"/>
@@ -3062,7 +3062,7 @@
       </p:sp>
       <p:sp>
         <p:nvSpPr>
-          <p:cNvPr id="76" name="Google Shape;76;p5:notes"/>
+          <p:cNvPr id="77" name="Google Shape;77;p5:notes"/>
           <p:cNvSpPr txBox="1"/>
           <p:nvPr>
             <p:ph idx="1" type="body"/>
@@ -3341,7 +3341,7 @@
       </p:sp>
       <p:sp>
         <p:nvSpPr>
-          <p:cNvPr id="77" name="Google Shape;77;p5:notes"/>
+          <p:cNvPr id="78" name="Google Shape;78;p5:notes"/>
           <p:cNvSpPr txBox="1"/>
           <p:nvPr>
             <p:ph idx="12" type="sldNum"/>
@@ -3396,7 +3396,7 @@
   <p:cSld>
     <p:spTree>
       <p:nvGrpSpPr>
-        <p:cNvPr id="83" name="Shape 83"/>
+        <p:cNvPr id="84" name="Shape 84"/>
         <p:cNvGrpSpPr/>
         <p:nvPr/>
       </p:nvGrpSpPr>
@@ -3410,7 +3410,7 @@
       </p:grpSpPr>
       <p:sp>
         <p:nvSpPr>
-          <p:cNvPr id="84" name="Google Shape;84;p7:notes"/>
+          <p:cNvPr id="85" name="Google Shape;85;p7:notes"/>
           <p:cNvSpPr/>
           <p:nvPr>
             <p:ph idx="2" type="sldImg"/>
@@ -3455,7 +3455,7 @@
       </p:sp>
       <p:sp>
         <p:nvSpPr>
-          <p:cNvPr id="85" name="Google Shape;85;p7:notes"/>
+          <p:cNvPr id="86" name="Google Shape;86;p7:notes"/>
           <p:cNvSpPr txBox="1"/>
           <p:nvPr>
             <p:ph idx="1" type="body"/>
@@ -3818,7 +3818,7 @@
       </p:sp>
       <p:sp>
         <p:nvSpPr>
-          <p:cNvPr id="86" name="Google Shape;86;p7:notes"/>
+          <p:cNvPr id="87" name="Google Shape;87;p7:notes"/>
           <p:cNvSpPr txBox="1"/>
           <p:nvPr>
             <p:ph idx="12" type="sldNum"/>
@@ -6457,7 +6457,7 @@
         </p:nvSpPr>
         <p:spPr>
           <a:xfrm>
-            <a:off x="522122" y="2399400"/>
+            <a:off x="457197" y="2399400"/>
             <a:ext cx="2881500" cy="614400"/>
           </a:xfrm>
           <a:prstGeom prst="rect">
@@ -6697,8 +6697,8 @@
         </p:nvSpPr>
         <p:spPr>
           <a:xfrm>
-            <a:off x="4419600" y="1126927"/>
-            <a:ext cx="4724400" cy="160734"/>
+            <a:off x="4419600" y="250627"/>
+            <a:ext cx="4724400" cy="160800"/>
           </a:xfrm>
           <a:prstGeom prst="rect">
             <a:avLst/>
@@ -6763,7 +6763,7 @@
         </p:nvSpPr>
         <p:spPr>
           <a:xfrm>
-            <a:off x="4419600" y="1417737"/>
+            <a:off x="4419600" y="741462"/>
             <a:ext cx="4267200" cy="723900"/>
           </a:xfrm>
           <a:prstGeom prst="rect">
@@ -6829,8 +6829,8 @@
         </p:nvSpPr>
         <p:spPr>
           <a:xfrm>
-            <a:off x="4419600" y="2233017"/>
-            <a:ext cx="2019300" cy="28575"/>
+            <a:off x="4419600" y="1556742"/>
+            <a:ext cx="2019300" cy="28500"/>
           </a:xfrm>
           <a:prstGeom prst="rect">
             <a:avLst/>
@@ -6872,8 +6872,8 @@
         </p:nvSpPr>
         <p:spPr>
           <a:xfrm>
-            <a:off x="4591050" y="2433042"/>
-            <a:ext cx="1676400" cy="534888"/>
+            <a:off x="4591050" y="1756767"/>
+            <a:ext cx="1676400" cy="534900"/>
           </a:xfrm>
           <a:prstGeom prst="rect">
             <a:avLst/>
@@ -6938,8 +6938,8 @@
         </p:nvSpPr>
         <p:spPr>
           <a:xfrm>
-            <a:off x="4591050" y="3089374"/>
-            <a:ext cx="1676400" cy="755749"/>
+            <a:off x="4591050" y="2413099"/>
+            <a:ext cx="1676400" cy="755700"/>
           </a:xfrm>
           <a:prstGeom prst="rect">
             <a:avLst/>
@@ -7185,8 +7185,8 @@
         </p:nvSpPr>
         <p:spPr>
           <a:xfrm>
-            <a:off x="6667500" y="2233017"/>
-            <a:ext cx="2019300" cy="28575"/>
+            <a:off x="6667500" y="1556742"/>
+            <a:ext cx="2019300" cy="28500"/>
           </a:xfrm>
           <a:prstGeom prst="rect">
             <a:avLst/>
@@ -7228,8 +7228,8 @@
         </p:nvSpPr>
         <p:spPr>
           <a:xfrm>
-            <a:off x="6838950" y="2433042"/>
-            <a:ext cx="1676400" cy="534888"/>
+            <a:off x="6838950" y="1756767"/>
+            <a:ext cx="1676400" cy="534900"/>
           </a:xfrm>
           <a:prstGeom prst="rect">
             <a:avLst/>
@@ -7294,8 +7294,8 @@
         </p:nvSpPr>
         <p:spPr>
           <a:xfrm>
-            <a:off x="6838950" y="3089374"/>
-            <a:ext cx="1676400" cy="755749"/>
+            <a:off x="6838950" y="2413099"/>
+            <a:ext cx="1676400" cy="755700"/>
           </a:xfrm>
           <a:prstGeom prst="rect">
             <a:avLst/>
@@ -7368,7 +7368,7 @@
         </p:blipFill>
         <p:spPr>
           <a:xfrm>
-            <a:off x="200025" y="3326675"/>
+            <a:off x="142875" y="3440975"/>
             <a:ext cx="2462675" cy="1628774"/>
           </a:xfrm>
           <a:prstGeom prst="rect">
@@ -7388,7 +7388,7 @@
         </p:nvSpPr>
         <p:spPr>
           <a:xfrm>
-            <a:off x="552450" y="3578350"/>
+            <a:off x="485775" y="3740275"/>
             <a:ext cx="304800" cy="314400"/>
           </a:xfrm>
           <a:prstGeom prst="ellipse">
@@ -7443,8 +7443,8 @@
         </p:blipFill>
         <p:spPr>
           <a:xfrm>
-            <a:off x="2750412" y="2084476"/>
-            <a:ext cx="1581488" cy="2870975"/>
+            <a:off x="2695226" y="2413100"/>
+            <a:ext cx="1463437" cy="2656650"/>
           </a:xfrm>
           <a:prstGeom prst="rect">
             <a:avLst/>
@@ -7463,7 +7463,7 @@
         </p:nvSpPr>
         <p:spPr>
           <a:xfrm>
-            <a:off x="3095625" y="2233025"/>
+            <a:off x="2977575" y="2571050"/>
             <a:ext cx="1181100" cy="439800"/>
           </a:xfrm>
           <a:prstGeom prst="ellipse">
@@ -7508,18 +7508,17 @@
           <p:cNvPicPr preferRelativeResize="0"/>
           <p:nvPr/>
         </p:nvPicPr>
-        <p:blipFill>
+        <p:blipFill rotWithShape="1">
           <a:blip r:embed="rId5">
             <a:alphaModFix/>
           </a:blip>
-          <a:stretch>
-            <a:fillRect/>
-          </a:stretch>
+          <a:srcRect b="0" l="1549" r="382" t="0"/>
+          <a:stretch/>
         </p:blipFill>
         <p:spPr>
           <a:xfrm>
-            <a:off x="200024" y="1979750"/>
-            <a:ext cx="2462675" cy="1184000"/>
+            <a:off x="130150" y="2198950"/>
+            <a:ext cx="2415050" cy="1184000"/>
           </a:xfrm>
           <a:prstGeom prst="rect">
             <a:avLst/>
@@ -7546,8 +7545,36 @@
         </p:blipFill>
         <p:spPr>
           <a:xfrm>
-            <a:off x="200025" y="1204000"/>
+            <a:off x="123825" y="93525"/>
             <a:ext cx="4152901" cy="662700"/>
+          </a:xfrm>
+          <a:prstGeom prst="rect">
+            <a:avLst/>
+          </a:prstGeom>
+          <a:noFill/>
+          <a:ln>
+            <a:noFill/>
+          </a:ln>
+        </p:spPr>
+      </p:pic>
+      <p:pic>
+        <p:nvPicPr>
+          <p:cNvPr id="74" name="Google Shape;74;p8"/>
+          <p:cNvPicPr preferRelativeResize="0"/>
+          <p:nvPr/>
+        </p:nvPicPr>
+        <p:blipFill>
+          <a:blip r:embed="rId7">
+            <a:alphaModFix/>
+          </a:blip>
+          <a:stretch>
+            <a:fillRect/>
+          </a:stretch>
+        </p:blipFill>
+        <p:spPr>
+          <a:xfrm>
+            <a:off x="104775" y="814250"/>
+            <a:ext cx="3392493" cy="1326675"/>
           </a:xfrm>
           <a:prstGeom prst="rect">
             <a:avLst/>
@@ -7571,7 +7598,7 @@
   <p:cSld>
     <p:spTree>
       <p:nvGrpSpPr>
-        <p:cNvPr id="78" name="Shape 78"/>
+        <p:cNvPr id="79" name="Shape 79"/>
         <p:cNvGrpSpPr/>
         <p:nvPr/>
       </p:nvGrpSpPr>
@@ -7585,7 +7612,7 @@
       </p:grpSpPr>
       <p:sp>
         <p:nvSpPr>
-          <p:cNvPr id="79" name="Google Shape;79;p9"/>
+          <p:cNvPr id="80" name="Google Shape;80;p9"/>
           <p:cNvSpPr/>
           <p:nvPr/>
         </p:nvSpPr>
@@ -7651,7 +7678,7 @@
       </p:sp>
       <p:sp>
         <p:nvSpPr>
-          <p:cNvPr id="80" name="Google Shape;80;p9"/>
+          <p:cNvPr id="81" name="Google Shape;81;p9"/>
           <p:cNvSpPr/>
           <p:nvPr/>
         </p:nvSpPr>
@@ -7717,7 +7744,7 @@
       </p:sp>
       <p:sp>
         <p:nvSpPr>
-          <p:cNvPr id="81" name="Google Shape;81;p9"/>
+          <p:cNvPr id="82" name="Google Shape;82;p9"/>
           <p:cNvSpPr/>
           <p:nvPr/>
         </p:nvSpPr>
@@ -8061,7 +8088,7 @@
       </p:sp>
       <p:pic>
         <p:nvPicPr>
-          <p:cNvPr id="82" name="Google Shape;82;p9"/>
+          <p:cNvPr id="83" name="Google Shape;83;p9"/>
           <p:cNvPicPr preferRelativeResize="0"/>
           <p:nvPr/>
         </p:nvPicPr>
@@ -8100,7 +8127,7 @@
   <p:cSld>
     <p:spTree>
       <p:nvGrpSpPr>
-        <p:cNvPr id="87" name="Shape 87"/>
+        <p:cNvPr id="88" name="Shape 88"/>
         <p:cNvGrpSpPr/>
         <p:nvPr/>
       </p:nvGrpSpPr>
@@ -8114,7 +8141,7 @@
       </p:grpSpPr>
       <p:sp>
         <p:nvSpPr>
-          <p:cNvPr id="88" name="Google Shape;88;p10"/>
+          <p:cNvPr id="89" name="Google Shape;89;p10"/>
           <p:cNvSpPr/>
           <p:nvPr/>
         </p:nvSpPr>
@@ -8159,7 +8186,7 @@
       </p:sp>
       <p:sp>
         <p:nvSpPr>
-          <p:cNvPr id="89" name="Google Shape;89;p10"/>
+          <p:cNvPr id="90" name="Google Shape;90;p10"/>
           <p:cNvSpPr/>
           <p:nvPr/>
         </p:nvSpPr>
@@ -8225,7 +8252,7 @@
       </p:sp>
       <p:sp>
         <p:nvSpPr>
-          <p:cNvPr id="90" name="Google Shape;90;p10"/>
+          <p:cNvPr id="91" name="Google Shape;91;p10"/>
           <p:cNvSpPr/>
           <p:nvPr/>
         </p:nvSpPr>
@@ -8291,7 +8318,7 @@
       </p:sp>
       <p:sp>
         <p:nvSpPr>
-          <p:cNvPr id="91" name="Google Shape;91;p10"/>
+          <p:cNvPr id="92" name="Google Shape;92;p10"/>
           <p:cNvSpPr/>
           <p:nvPr/>
         </p:nvSpPr>
@@ -8334,7 +8361,7 @@
       </p:sp>
       <p:sp>
         <p:nvSpPr>
-          <p:cNvPr id="92" name="Google Shape;92;p10"/>
+          <p:cNvPr id="93" name="Google Shape;93;p10"/>
           <p:cNvSpPr/>
           <p:nvPr/>
         </p:nvSpPr>
@@ -8400,7 +8427,7 @@
       </p:sp>
       <p:sp>
         <p:nvSpPr>
-          <p:cNvPr id="93" name="Google Shape;93;p10"/>
+          <p:cNvPr id="94" name="Google Shape;94;p10"/>
           <p:cNvSpPr/>
           <p:nvPr/>
         </p:nvSpPr>
@@ -8528,7 +8555,7 @@
       </p:sp>
       <p:pic>
         <p:nvPicPr>
-          <p:cNvPr descr="preencoded.png" id="94" name="Google Shape;94;p10"/>
+          <p:cNvPr descr="preencoded.png" id="95" name="Google Shape;95;p10"/>
           <p:cNvPicPr preferRelativeResize="0"/>
           <p:nvPr/>
         </p:nvPicPr>
@@ -8555,14 +8582,14 @@
       </p:pic>
       <p:sp>
         <p:nvSpPr>
-          <p:cNvPr id="95" name="Google Shape;95;p10"/>
+          <p:cNvPr id="96" name="Google Shape;96;p10"/>
           <p:cNvSpPr/>
           <p:nvPr/>
         </p:nvSpPr>
         <p:spPr>
           <a:xfrm>
-            <a:off x="560050" y="3721878"/>
-            <a:ext cx="4533900" cy="766800"/>
+            <a:off x="628650" y="4236225"/>
+            <a:ext cx="6576000" cy="766800"/>
           </a:xfrm>
           <a:prstGeom prst="rect">
             <a:avLst/>
@@ -8636,7 +8663,7 @@
                 <a:cs typeface="Saira Condensed"/>
                 <a:sym typeface="Saira Condensed"/>
               </a:rPr>
-              <a:t>Kartki z Syrenka </a:t>
+              <a:t>Następny</a:t>
             </a:r>
             <a:r>
               <a:rPr b="1" lang="en-US" sz="1150">
@@ -8648,7 +8675,7 @@
                 <a:cs typeface="Saira Condensed"/>
                 <a:sym typeface="Saira Condensed"/>
               </a:rPr>
-              <a:t>łazienkowa na przystankach</a:t>
+              <a:t> przystanek: toaleta = w</a:t>
             </a:r>
             <a:r>
               <a:rPr b="1" lang="en-US" sz="1150">
@@ -8660,10 +8687,10 @@
                 <a:cs typeface="Saira Condensed"/>
                 <a:sym typeface="Saira Condensed"/>
               </a:rPr>
-              <a:t> = w</a:t>
-            </a:r>
-            <a:r>
-              <a:rPr b="1" lang="en-US" sz="1150">
+              <a:t>izerunek</a:t>
+            </a:r>
+            <a:r>
+              <a:rPr b="1" i="0" lang="en-US" sz="1150" u="none" cap="none" strike="noStrike">
                 <a:solidFill>
                   <a:srgbClr val="1F2B5E"/>
                 </a:solidFill>
@@ -8672,10 +8699,10 @@
                 <a:cs typeface="Saira Condensed"/>
                 <a:sym typeface="Saira Condensed"/>
               </a:rPr>
-              <a:t>izerunek</a:t>
-            </a:r>
-            <a:r>
-              <a:rPr b="1" i="0" lang="en-US" sz="1150" u="none" cap="none" strike="noStrike">
+              <a:t> </a:t>
+            </a:r>
+            <a:r>
+              <a:rPr b="1" lang="en-US" sz="1150">
                 <a:solidFill>
                   <a:srgbClr val="1F2B5E"/>
                 </a:solidFill>
@@ -8684,10 +8711,10 @@
                 <a:cs typeface="Saira Condensed"/>
                 <a:sym typeface="Saira Condensed"/>
               </a:rPr>
-              <a:t> </a:t>
-            </a:r>
-            <a:r>
-              <a:rPr b="1" lang="en-US" sz="1150">
+              <a:t>bezpieczeństwa</a:t>
+            </a:r>
+            <a:r>
+              <a:rPr b="1" i="0" lang="en-US" sz="1150" u="none" cap="none" strike="noStrike">
                 <a:solidFill>
                   <a:srgbClr val="1F2B5E"/>
                 </a:solidFill>
@@ -8696,10 +8723,10 @@
                 <a:cs typeface="Saira Condensed"/>
                 <a:sym typeface="Saira Condensed"/>
               </a:rPr>
-              <a:t>bezpieczeństwa</a:t>
-            </a:r>
-            <a:r>
-              <a:rPr b="1" i="0" lang="en-US" sz="1150" u="none" cap="none" strike="noStrike">
+              <a:t> i </a:t>
+            </a:r>
+            <a:r>
+              <a:rPr b="1" lang="en-US" sz="1150">
                 <a:solidFill>
                   <a:srgbClr val="1F2B5E"/>
                 </a:solidFill>
@@ -8708,10 +8735,10 @@
                 <a:cs typeface="Saira Condensed"/>
                 <a:sym typeface="Saira Condensed"/>
               </a:rPr>
-              <a:t> i </a:t>
-            </a:r>
-            <a:r>
-              <a:rPr b="1" lang="en-US" sz="1150">
+              <a:t>czystości</a:t>
+            </a:r>
+            <a:r>
+              <a:rPr b="1" i="0" lang="en-US" sz="1150" u="none" cap="none" strike="noStrike">
                 <a:solidFill>
                   <a:srgbClr val="1F2B5E"/>
                 </a:solidFill>
@@ -8720,10 +8747,10 @@
                 <a:cs typeface="Saira Condensed"/>
                 <a:sym typeface="Saira Condensed"/>
               </a:rPr>
-              <a:t>czystości</a:t>
-            </a:r>
-            <a:r>
-              <a:rPr b="1" i="0" lang="en-US" sz="1150" u="none" cap="none" strike="noStrike">
+              <a:t>  dla Warszawy dla </a:t>
+            </a:r>
+            <a:r>
+              <a:rPr b="1" lang="en-US" sz="1150">
                 <a:solidFill>
                   <a:srgbClr val="1F2B5E"/>
                 </a:solidFill>
@@ -8732,10 +8759,10 @@
                 <a:cs typeface="Saira Condensed"/>
                 <a:sym typeface="Saira Condensed"/>
               </a:rPr>
-              <a:t>  dla Warszawy dla </a:t>
-            </a:r>
-            <a:r>
-              <a:rPr b="1" lang="en-US" sz="1150">
+              <a:t>seniorów</a:t>
+            </a:r>
+            <a:r>
+              <a:rPr b="1" i="0" lang="en-US" sz="1150" u="none" cap="none" strike="noStrike">
                 <a:solidFill>
                   <a:srgbClr val="1F2B5E"/>
                 </a:solidFill>
@@ -8744,10 +8771,10 @@
                 <a:cs typeface="Saira Condensed"/>
                 <a:sym typeface="Saira Condensed"/>
               </a:rPr>
-              <a:t>seniorów</a:t>
-            </a:r>
-            <a:r>
-              <a:rPr b="1" i="0" lang="en-US" sz="1150" u="none" cap="none" strike="noStrike">
+              <a:t> i dla </a:t>
+            </a:r>
+            <a:r>
+              <a:rPr b="1" lang="en-US" sz="1150">
                 <a:solidFill>
                   <a:srgbClr val="1F2B5E"/>
                 </a:solidFill>
@@ -8756,10 +8783,10 @@
                 <a:cs typeface="Saira Condensed"/>
                 <a:sym typeface="Saira Condensed"/>
               </a:rPr>
-              <a:t> i dla </a:t>
-            </a:r>
-            <a:r>
-              <a:rPr b="1" lang="en-US" sz="1150">
+              <a:t>przyjezdnych</a:t>
+            </a:r>
+            <a:r>
+              <a:rPr b="1" i="0" lang="en-US" sz="1150" u="none" cap="none" strike="noStrike">
                 <a:solidFill>
                   <a:srgbClr val="1F2B5E"/>
                 </a:solidFill>
@@ -8768,42 +8795,92 @@
                 <a:cs typeface="Saira Condensed"/>
                 <a:sym typeface="Saira Condensed"/>
               </a:rPr>
-              <a:t>przyjezdnych</a:t>
-            </a:r>
-            <a:r>
-              <a:rPr b="1" i="0" lang="en-US" sz="1150" u="none" cap="none" strike="noStrike">
-                <a:solidFill>
-                  <a:srgbClr val="1F2B5E"/>
-                </a:solidFill>
-                <a:latin typeface="Saira Condensed"/>
-                <a:ea typeface="Saira Condensed"/>
-                <a:cs typeface="Saira Condensed"/>
-                <a:sym typeface="Saira Condensed"/>
-              </a:rPr>
               <a:t> </a:t>
             </a:r>
             <a:endParaRPr b="1" i="0" sz="1150" u="none" cap="none" strike="noStrike">
               <a:solidFill>
-                <a:schemeClr val="dk1"/>
+                <a:srgbClr val="1F2B5E"/>
               </a:solidFill>
-              <a:latin typeface="Calibri"/>
-              <a:ea typeface="Calibri"/>
-              <a:cs typeface="Calibri"/>
-              <a:sym typeface="Calibri"/>
+              <a:latin typeface="Saira Condensed"/>
+              <a:ea typeface="Saira Condensed"/>
+              <a:cs typeface="Saira Condensed"/>
+              <a:sym typeface="Saira Condensed"/>
+            </a:endParaRPr>
+          </a:p>
+          <a:p>
+            <a:pPr indent="0" lvl="0" marL="0" marR="0" rtl="0" algn="l">
+              <a:lnSpc>
+                <a:spcPct val="107000"/>
+              </a:lnSpc>
+              <a:spcBef>
+                <a:spcPts val="750"/>
+              </a:spcBef>
+              <a:spcAft>
+                <a:spcPts val="0"/>
+              </a:spcAft>
+              <a:buClr>
+                <a:srgbClr val="1F2B5E"/>
+              </a:buClr>
+              <a:buSzPts val="1150"/>
+              <a:buFont typeface="Saira Condensed Medium"/>
+              <a:buNone/>
+            </a:pPr>
+            <a:r>
+              <a:t/>
+            </a:r>
+            <a:endParaRPr b="1" sz="1150">
+              <a:solidFill>
+                <a:srgbClr val="1F2B5E"/>
+              </a:solidFill>
+              <a:latin typeface="Saira Condensed"/>
+              <a:ea typeface="Saira Condensed"/>
+              <a:cs typeface="Saira Condensed"/>
+              <a:sym typeface="Saira Condensed"/>
+            </a:endParaRPr>
+          </a:p>
+          <a:p>
+            <a:pPr indent="0" lvl="0" marL="0" marR="0" rtl="0" algn="l">
+              <a:lnSpc>
+                <a:spcPct val="107000"/>
+              </a:lnSpc>
+              <a:spcBef>
+                <a:spcPts val="750"/>
+              </a:spcBef>
+              <a:spcAft>
+                <a:spcPts val="0"/>
+              </a:spcAft>
+              <a:buClr>
+                <a:srgbClr val="1F2B5E"/>
+              </a:buClr>
+              <a:buSzPts val="1150"/>
+              <a:buFont typeface="Saira Condensed Medium"/>
+              <a:buNone/>
+            </a:pPr>
+            <a:r>
+              <a:t/>
+            </a:r>
+            <a:endParaRPr b="1" sz="1150">
+              <a:solidFill>
+                <a:srgbClr val="1F2B5E"/>
+              </a:solidFill>
+              <a:latin typeface="Saira Condensed"/>
+              <a:ea typeface="Saira Condensed"/>
+              <a:cs typeface="Saira Condensed"/>
+              <a:sym typeface="Saira Condensed"/>
             </a:endParaRPr>
           </a:p>
         </p:txBody>
       </p:sp>
       <p:sp>
         <p:nvSpPr>
-          <p:cNvPr id="96" name="Google Shape;96;p10"/>
+          <p:cNvPr id="97" name="Google Shape;97;p10"/>
           <p:cNvSpPr txBox="1"/>
           <p:nvPr/>
         </p:nvSpPr>
         <p:spPr>
           <a:xfrm>
-            <a:off x="560050" y="3105150"/>
-            <a:ext cx="3202200" cy="571200"/>
+            <a:off x="556200" y="3161800"/>
+            <a:ext cx="4602600" cy="856800"/>
           </a:xfrm>
           <a:prstGeom prst="rect">
             <a:avLst/>
@@ -8865,7 +8942,31 @@
                 <a:cs typeface="Saira Condensed Medium"/>
                 <a:sym typeface="Saira Condensed Medium"/>
               </a:rPr>
-              <a:t> 2025 rok pod znakiem rekordow w turystyce”, 2026</a:t>
+              <a:t> 2025 rok pod znakiem </a:t>
+            </a:r>
+            <a:r>
+              <a:rPr lang="en-US" sz="800">
+                <a:solidFill>
+                  <a:srgbClr val="1F2B5E"/>
+                </a:solidFill>
+                <a:latin typeface="Saira Condensed Medium"/>
+                <a:ea typeface="Saira Condensed Medium"/>
+                <a:cs typeface="Saira Condensed Medium"/>
+                <a:sym typeface="Saira Condensed Medium"/>
+              </a:rPr>
+              <a:t>rekordów</a:t>
+            </a:r>
+            <a:r>
+              <a:rPr lang="en-US" sz="800">
+                <a:solidFill>
+                  <a:srgbClr val="1F2B5E"/>
+                </a:solidFill>
+                <a:latin typeface="Saira Condensed Medium"/>
+                <a:ea typeface="Saira Condensed Medium"/>
+                <a:cs typeface="Saira Condensed Medium"/>
+                <a:sym typeface="Saira Condensed Medium"/>
+              </a:rPr>
+              <a:t> w turystyce”, 2026</a:t>
             </a:r>
             <a:endParaRPr sz="800">
               <a:solidFill>
@@ -8901,6 +9002,46 @@
               <a:ea typeface="Saira Condensed Medium"/>
               <a:cs typeface="Saira Condensed Medium"/>
               <a:sym typeface="Saira Condensed Medium"/>
+            </a:endParaRPr>
+          </a:p>
+          <a:p>
+            <a:pPr indent="0" lvl="0" marL="0" rtl="0" algn="l">
+              <a:lnSpc>
+                <a:spcPct val="107000"/>
+              </a:lnSpc>
+              <a:spcBef>
+                <a:spcPts val="750"/>
+              </a:spcBef>
+              <a:spcAft>
+                <a:spcPts val="0"/>
+              </a:spcAft>
+              <a:buClr>
+                <a:srgbClr val="1F2B5E"/>
+              </a:buClr>
+              <a:buSzPts val="1150"/>
+              <a:buFont typeface="Saira Condensed Medium"/>
+              <a:buNone/>
+            </a:pPr>
+            <a:r>
+              <a:rPr b="1" lang="en-US" sz="1150">
+                <a:solidFill>
+                  <a:srgbClr val="D8232A"/>
+                </a:solidFill>
+                <a:latin typeface="Saira Condensed"/>
+                <a:ea typeface="Saira Condensed"/>
+                <a:cs typeface="Saira Condensed"/>
+                <a:sym typeface="Saira Condensed"/>
+              </a:rPr>
+              <a:t>Niech wyjeżdżają z myślą to miasto dba nie tylko o mieszkańców, ale też o gości.</a:t>
+            </a:r>
+            <a:endParaRPr sz="900">
+              <a:solidFill>
+                <a:srgbClr val="D8232A"/>
+              </a:solidFill>
+              <a:latin typeface="Courier New"/>
+              <a:ea typeface="Courier New"/>
+              <a:cs typeface="Courier New"/>
+              <a:sym typeface="Courier New"/>
             </a:endParaRPr>
           </a:p>
           <a:p>

--- a/3_WeAreHereForPizza_Następny_przystanek_toaleta.pptx
+++ b/3_WeAreHereForPizza_Następny_przystanek_toaleta.pptx
@@ -2006,7 +2006,7 @@
       </p:grpSpPr>
       <p:sp>
         <p:nvSpPr>
-          <p:cNvPr id="39" name="Google Shape;39;p6:notes"/>
+          <p:cNvPr id="39" name="Google Shape;39;p4:notes"/>
           <p:cNvSpPr/>
           <p:nvPr>
             <p:ph idx="2" type="sldImg"/>
@@ -2051,7 +2051,7 @@
       </p:sp>
       <p:sp>
         <p:nvSpPr>
-          <p:cNvPr id="40" name="Google Shape;40;p6:notes"/>
+          <p:cNvPr id="40" name="Google Shape;40;p4:notes"/>
           <p:cNvSpPr txBox="1"/>
           <p:nvPr>
             <p:ph idx="1" type="body"/>
@@ -2094,7 +2094,73 @@
               <a:buNone/>
             </a:pPr>
             <a:r>
-              <a:t/>
+              <a:rPr lang="en-US"/>
+              <a:t>skonowlaibyscie nieznane cody QR?</a:t>
+            </a:r>
+            <a:endParaRPr/>
+          </a:p>
+          <a:p>
+            <a:pPr indent="0" lvl="0" marL="0" rtl="0" algn="l">
+              <a:lnSpc>
+                <a:spcPct val="150000"/>
+              </a:lnSpc>
+              <a:spcBef>
+                <a:spcPts val="0"/>
+              </a:spcBef>
+              <a:spcAft>
+                <a:spcPts val="0"/>
+              </a:spcAft>
+              <a:buClr>
+                <a:schemeClr val="dk1"/>
+              </a:buClr>
+              <a:buSzPts val="1100"/>
+              <a:buFont typeface="Arial"/>
+              <a:buNone/>
+            </a:pPr>
+            <a:r>
+              <a:rPr lang="en-US" sz="900">
+                <a:solidFill>
+                  <a:srgbClr val="141414"/>
+                </a:solidFill>
+                <a:highlight>
+                  <a:srgbClr val="FCFCFC"/>
+                </a:highlight>
+                <a:latin typeface="Courier New"/>
+                <a:ea typeface="Courier New"/>
+                <a:cs typeface="Courier New"/>
+                <a:sym typeface="Courier New"/>
+              </a:rPr>
+              <a:t>Po pierwsze: </a:t>
+            </a:r>
+            <a:r>
+              <a:rPr b="1" lang="en-US" sz="900">
+                <a:solidFill>
+                  <a:srgbClr val="141414"/>
+                </a:solidFill>
+                <a:highlight>
+                  <a:srgbClr val="FCFCFC"/>
+                </a:highlight>
+                <a:latin typeface="Courier New"/>
+                <a:ea typeface="Courier New"/>
+                <a:cs typeface="Courier New"/>
+                <a:sym typeface="Courier New"/>
+              </a:rPr>
+              <a:t>**nie trzeba telefonu**</a:t>
+            </a:r>
+            <a:r>
+              <a:rPr lang="en-US" sz="900">
+                <a:solidFill>
+                  <a:srgbClr val="141414"/>
+                </a:solidFill>
+                <a:highlight>
+                  <a:srgbClr val="FCFCFC"/>
+                </a:highlight>
+                <a:latin typeface="Courier New"/>
+                <a:ea typeface="Courier New"/>
+                <a:cs typeface="Courier New"/>
+                <a:sym typeface="Courier New"/>
+              </a:rPr>
+              <a:t>. Mniej więcej połowa osób po sześćdziesiątce piątce nie korzysta z internetu. </a:t>
             </a:r>
             <a:endParaRPr sz="900">
               <a:solidFill>
@@ -2111,6 +2177,82 @@
           </a:p>
           <a:p>
             <a:pPr indent="0" lvl="0" marL="0" rtl="0" algn="l">
+              <a:lnSpc>
+                <a:spcPct val="150000"/>
+              </a:lnSpc>
+              <a:spcBef>
+                <a:spcPts val="0"/>
+              </a:spcBef>
+              <a:spcAft>
+                <a:spcPts val="0"/>
+              </a:spcAft>
+              <a:buClr>
+                <a:schemeClr val="dk1"/>
+              </a:buClr>
+              <a:buSzPts val="1100"/>
+              <a:buFont typeface="Arial"/>
+              <a:buNone/>
+            </a:pPr>
+            <a:r>
+              <a:rPr lang="en-US" sz="900">
+                <a:solidFill>
+                  <a:srgbClr val="141414"/>
+                </a:solidFill>
+                <a:highlight>
+                  <a:srgbClr val="FCFCFC"/>
+                </a:highlight>
+                <a:latin typeface="Courier New"/>
+                <a:ea typeface="Courier New"/>
+                <a:cs typeface="Courier New"/>
+                <a:sym typeface="Courier New"/>
+              </a:rPr>
+              <a:t>Po drugie: </a:t>
+            </a:r>
+            <a:r>
+              <a:rPr b="1" lang="en-US" sz="900">
+                <a:solidFill>
+                  <a:srgbClr val="141414"/>
+                </a:solidFill>
+                <a:highlight>
+                  <a:srgbClr val="FCFCFC"/>
+                </a:highlight>
+                <a:latin typeface="Courier New"/>
+                <a:ea typeface="Courier New"/>
+                <a:cs typeface="Courier New"/>
+                <a:sym typeface="Courier New"/>
+              </a:rPr>
+              <a:t>**jesteśmy tam, gdzie się czeka**</a:t>
+            </a:r>
+            <a:r>
+              <a:rPr lang="en-US" sz="900">
+                <a:solidFill>
+                  <a:srgbClr val="141414"/>
+                </a:solidFill>
+                <a:highlight>
+                  <a:srgbClr val="FCFCFC"/>
+                </a:highlight>
+                <a:latin typeface="Courier New"/>
+                <a:ea typeface="Courier New"/>
+                <a:cs typeface="Courier New"/>
+                <a:sym typeface="Courier New"/>
+              </a:rPr>
+              <a:t>. Każda podróż komunikacją zaczyna się i kończy na przystanku. Tam jest czas, żeby przeczytać kartkę.</a:t>
+            </a:r>
+            <a:endParaRPr sz="900">
+              <a:solidFill>
+                <a:srgbClr val="141414"/>
+              </a:solidFill>
+              <a:highlight>
+                <a:srgbClr val="FCFCFC"/>
+              </a:highlight>
+              <a:latin typeface="Courier New"/>
+              <a:ea typeface="Courier New"/>
+              <a:cs typeface="Courier New"/>
+              <a:sym typeface="Courier New"/>
+            </a:endParaRPr>
+          </a:p>
+          <a:p>
+            <a:pPr indent="0" lvl="0" marL="0" rtl="0" algn="l">
               <a:spcBef>
                 <a:spcPts val="0"/>
               </a:spcBef>
@@ -2128,7 +2270,7 @@
       </p:sp>
       <p:sp>
         <p:nvSpPr>
-          <p:cNvPr id="41" name="Google Shape;41;p6:notes"/>
+          <p:cNvPr id="41" name="Google Shape;41;p4:notes"/>
           <p:cNvSpPr txBox="1"/>
           <p:nvPr>
             <p:ph idx="12" type="sldNum"/>
@@ -2183,7 +2325,7 @@
   <p:cSld>
     <p:spTree>
       <p:nvGrpSpPr>
-        <p:cNvPr id="46" name="Shape 46"/>
+        <p:cNvPr id="58" name="Shape 58"/>
         <p:cNvGrpSpPr/>
         <p:nvPr/>
       </p:nvGrpSpPr>
@@ -2197,7 +2339,7 @@
       </p:grpSpPr>
       <p:sp>
         <p:nvSpPr>
-          <p:cNvPr id="47" name="Google Shape;47;p3:notes"/>
+          <p:cNvPr id="59" name="Google Shape;59;p6:notes"/>
           <p:cNvSpPr/>
           <p:nvPr>
             <p:ph idx="2" type="sldImg"/>
@@ -2242,7 +2384,7 @@
       </p:sp>
       <p:sp>
         <p:nvSpPr>
-          <p:cNvPr id="48" name="Google Shape;48;p3:notes"/>
+          <p:cNvPr id="60" name="Google Shape;60;p6:notes"/>
           <p:cNvSpPr txBox="1"/>
           <p:nvPr>
             <p:ph idx="1" type="body"/>
@@ -2285,125 +2427,7 @@
               <a:buNone/>
             </a:pPr>
             <a:r>
-              <a:rPr lang="en-US" sz="900">
-                <a:solidFill>
-                  <a:schemeClr val="lt1"/>
-                </a:solidFill>
-                <a:highlight>
-                  <a:schemeClr val="dk1"/>
-                </a:highlight>
-                <a:latin typeface="Courier New"/>
-                <a:ea typeface="Courier New"/>
-                <a:cs typeface="Courier New"/>
-                <a:sym typeface="Courier New"/>
-              </a:rPr>
-              <a:t>Ta sama podróż jeszcze raz. Pani Halina wysiada z autobusu. Obok rozkładu wisi kartka. </a:t>
-            </a:r>
-            <a:r>
-              <a:rPr i="1" lang="en-US" sz="900">
-                <a:solidFill>
-                  <a:schemeClr val="lt1"/>
-                </a:solidFill>
-                <a:highlight>
-                  <a:schemeClr val="dk1"/>
-                </a:highlight>
-                <a:latin typeface="Courier New"/>
-                <a:ea typeface="Courier New"/>
-                <a:cs typeface="Courier New"/>
-                <a:sym typeface="Courier New"/>
-              </a:rPr>
-              <a:t>*(pokazać kartkę)*</a:t>
-            </a:r>
-            <a:endParaRPr i="1" sz="900">
-              <a:solidFill>
-                <a:schemeClr val="lt1"/>
-              </a:solidFill>
-              <a:highlight>
-                <a:schemeClr val="dk1"/>
-              </a:highlight>
-              <a:latin typeface="Courier New"/>
-              <a:ea typeface="Courier New"/>
-              <a:cs typeface="Courier New"/>
-              <a:sym typeface="Courier New"/>
-            </a:endParaRPr>
-          </a:p>
-          <a:p>
-            <a:pPr indent="0" lvl="0" marL="0" rtl="0" algn="l">
-              <a:lnSpc>
-                <a:spcPct val="150000"/>
-              </a:lnSpc>
-              <a:spcBef>
-                <a:spcPts val="0"/>
-              </a:spcBef>
-              <a:spcAft>
-                <a:spcPts val="0"/>
-              </a:spcAft>
-              <a:buClr>
-                <a:schemeClr val="dk1"/>
-              </a:buClr>
-              <a:buSzPts val="1100"/>
-              <a:buFont typeface="Arial"/>
-              <a:buNone/>
-            </a:pPr>
-            <a:r>
               <a:t/>
-            </a:r>
-            <a:endParaRPr sz="900">
-              <a:solidFill>
-                <a:schemeClr val="lt1"/>
-              </a:solidFill>
-              <a:highlight>
-                <a:schemeClr val="dk1"/>
-              </a:highlight>
-              <a:latin typeface="Courier New"/>
-              <a:ea typeface="Courier New"/>
-              <a:cs typeface="Courier New"/>
-              <a:sym typeface="Courier New"/>
-            </a:endParaRPr>
-          </a:p>
-          <a:p>
-            <a:pPr indent="0" lvl="0" marL="0" rtl="0" algn="l">
-              <a:lnSpc>
-                <a:spcPct val="150000"/>
-              </a:lnSpc>
-              <a:spcBef>
-                <a:spcPts val="0"/>
-              </a:spcBef>
-              <a:spcAft>
-                <a:spcPts val="0"/>
-              </a:spcAft>
-              <a:buSzPts val="1100"/>
-              <a:buNone/>
-            </a:pPr>
-            <a:r>
-              <a:rPr lang="en-US" sz="900">
-                <a:solidFill>
-                  <a:schemeClr val="lt1"/>
-                </a:solidFill>
-                <a:highlight>
-                  <a:schemeClr val="dk1"/>
-                </a:highlight>
-                <a:latin typeface="Courier New"/>
-                <a:ea typeface="Courier New"/>
-                <a:cs typeface="Courier New"/>
-                <a:sym typeface="Courier New"/>
-              </a:rPr>
-              <a:t>„Najbliższa toaleta: 250 metrów, około 7 minut pieszo.” Mapka ze strzałką. Bezpłatna, dostępna dla wózków. Godziny otwarcia, a gdy zamknięta, najbliższa czynna. Po polsku i po angielsku.  </a:t>
-            </a:r>
-            <a:r>
-              <a:rPr lang="en-US" sz="900">
-                <a:solidFill>
-                  <a:srgbClr val="141414"/>
-                </a:solidFill>
-                <a:highlight>
-                  <a:srgbClr val="FCFCFC"/>
-                </a:highlight>
-                <a:latin typeface="Courier New"/>
-                <a:ea typeface="Courier New"/>
-                <a:cs typeface="Courier New"/>
-                <a:sym typeface="Courier New"/>
-              </a:rPr>
-              <a:t>Taką kartkę generujemy automatycznie dla każdego z siedmiu tysięcy słupków w Warszawie, z otwartych danych miasta. Wybieram przystanek… i mam plik do druku.</a:t>
             </a:r>
             <a:endParaRPr sz="900">
               <a:solidFill>
@@ -2420,184 +2444,6 @@
           </a:p>
           <a:p>
             <a:pPr indent="0" lvl="0" marL="0" rtl="0" algn="l">
-              <a:lnSpc>
-                <a:spcPct val="150000"/>
-              </a:lnSpc>
-              <a:spcBef>
-                <a:spcPts val="0"/>
-              </a:spcBef>
-              <a:spcAft>
-                <a:spcPts val="0"/>
-              </a:spcAft>
-              <a:buSzPts val="1100"/>
-              <a:buNone/>
-            </a:pPr>
-            <a:r>
-              <a:t/>
-            </a:r>
-            <a:endParaRPr sz="900">
-              <a:solidFill>
-                <a:srgbClr val="141414"/>
-              </a:solidFill>
-              <a:highlight>
-                <a:srgbClr val="FCFCFC"/>
-              </a:highlight>
-              <a:latin typeface="Courier New"/>
-              <a:ea typeface="Courier New"/>
-              <a:cs typeface="Courier New"/>
-              <a:sym typeface="Courier New"/>
-            </a:endParaRPr>
-          </a:p>
-          <a:p>
-            <a:pPr indent="0" lvl="0" marL="0" rtl="0" algn="l">
-              <a:lnSpc>
-                <a:spcPct val="150000"/>
-              </a:lnSpc>
-              <a:spcBef>
-                <a:spcPts val="0"/>
-              </a:spcBef>
-              <a:spcAft>
-                <a:spcPts val="0"/>
-              </a:spcAft>
-              <a:buClr>
-                <a:schemeClr val="dk1"/>
-              </a:buClr>
-              <a:buSzPts val="1100"/>
-              <a:buFont typeface="Arial"/>
-              <a:buNone/>
-            </a:pPr>
-            <a:r>
-              <a:t/>
-            </a:r>
-            <a:endParaRPr sz="900">
-              <a:solidFill>
-                <a:schemeClr val="lt1"/>
-              </a:solidFill>
-              <a:highlight>
-                <a:schemeClr val="dk1"/>
-              </a:highlight>
-              <a:latin typeface="Courier New"/>
-              <a:ea typeface="Courier New"/>
-              <a:cs typeface="Courier New"/>
-              <a:sym typeface="Courier New"/>
-            </a:endParaRPr>
-          </a:p>
-          <a:p>
-            <a:pPr indent="0" lvl="0" marL="0" rtl="0" algn="l">
-              <a:lnSpc>
-                <a:spcPct val="150000"/>
-              </a:lnSpc>
-              <a:spcBef>
-                <a:spcPts val="0"/>
-              </a:spcBef>
-              <a:spcAft>
-                <a:spcPts val="0"/>
-              </a:spcAft>
-              <a:buClr>
-                <a:schemeClr val="dk1"/>
-              </a:buClr>
-              <a:buSzPts val="1100"/>
-              <a:buFont typeface="Arial"/>
-              <a:buNone/>
-            </a:pPr>
-            <a:r>
-              <a:t/>
-            </a:r>
-            <a:endParaRPr sz="900">
-              <a:solidFill>
-                <a:schemeClr val="lt1"/>
-              </a:solidFill>
-              <a:highlight>
-                <a:schemeClr val="dk1"/>
-              </a:highlight>
-              <a:latin typeface="Courier New"/>
-              <a:ea typeface="Courier New"/>
-              <a:cs typeface="Courier New"/>
-              <a:sym typeface="Courier New"/>
-            </a:endParaRPr>
-          </a:p>
-          <a:p>
-            <a:pPr indent="0" lvl="0" marL="0" rtl="0" algn="l">
-              <a:lnSpc>
-                <a:spcPct val="150000"/>
-              </a:lnSpc>
-              <a:spcBef>
-                <a:spcPts val="0"/>
-              </a:spcBef>
-              <a:spcAft>
-                <a:spcPts val="0"/>
-              </a:spcAft>
-              <a:buClr>
-                <a:schemeClr val="dk1"/>
-              </a:buClr>
-              <a:buSzPts val="1100"/>
-              <a:buFont typeface="Arial"/>
-              <a:buNone/>
-            </a:pPr>
-            <a:r>
-              <a:rPr lang="en-US" sz="900">
-                <a:solidFill>
-                  <a:schemeClr val="lt1"/>
-                </a:solidFill>
-                <a:highlight>
-                  <a:schemeClr val="dk1"/>
-                </a:highlight>
-                <a:latin typeface="Courier New"/>
-                <a:ea typeface="Courier New"/>
-                <a:cs typeface="Courier New"/>
-                <a:sym typeface="Courier New"/>
-              </a:rPr>
-              <a:t>Pani Halina wie, że da radę. Więc rano wypiła herbatę i wzięła wodę.</a:t>
-            </a:r>
-            <a:endParaRPr sz="900">
-              <a:solidFill>
-                <a:schemeClr val="lt1"/>
-              </a:solidFill>
-              <a:highlight>
-                <a:schemeClr val="dk1"/>
-              </a:highlight>
-              <a:latin typeface="Courier New"/>
-              <a:ea typeface="Courier New"/>
-              <a:cs typeface="Courier New"/>
-              <a:sym typeface="Courier New"/>
-            </a:endParaRPr>
-          </a:p>
-          <a:p>
-            <a:pPr indent="0" lvl="0" marL="0" rtl="0" algn="l">
-              <a:lnSpc>
-                <a:spcPct val="150000"/>
-              </a:lnSpc>
-              <a:spcBef>
-                <a:spcPts val="0"/>
-              </a:spcBef>
-              <a:spcAft>
-                <a:spcPts val="0"/>
-              </a:spcAft>
-              <a:buClr>
-                <a:schemeClr val="dk1"/>
-              </a:buClr>
-              <a:buSzPts val="1100"/>
-              <a:buFont typeface="Arial"/>
-              <a:buNone/>
-            </a:pPr>
-            <a:r>
-              <a:t/>
-            </a:r>
-            <a:endParaRPr sz="900">
-              <a:solidFill>
-                <a:srgbClr val="141414"/>
-              </a:solidFill>
-              <a:highlight>
-                <a:srgbClr val="FCFCFC"/>
-              </a:highlight>
-              <a:latin typeface="Courier New"/>
-              <a:ea typeface="Courier New"/>
-              <a:cs typeface="Courier New"/>
-              <a:sym typeface="Courier New"/>
-            </a:endParaRPr>
-          </a:p>
-          <a:p>
-            <a:pPr indent="0" lvl="0" marL="0" rtl="0" algn="l">
               <a:spcBef>
                 <a:spcPts val="0"/>
               </a:spcBef>
@@ -2615,7 +2461,7 @@
       </p:sp>
       <p:sp>
         <p:nvSpPr>
-          <p:cNvPr id="49" name="Google Shape;49;p3:notes"/>
+          <p:cNvPr id="61" name="Google Shape;61;p6:notes"/>
           <p:cNvSpPr txBox="1"/>
           <p:nvPr>
             <p:ph idx="12" type="sldNum"/>
@@ -2670,7 +2516,7 @@
   <p:cSld>
     <p:spTree>
       <p:nvGrpSpPr>
-        <p:cNvPr id="55" name="Shape 55"/>
+        <p:cNvPr id="66" name="Shape 66"/>
         <p:cNvGrpSpPr/>
         <p:nvPr/>
       </p:nvGrpSpPr>
@@ -2684,7 +2530,7 @@
       </p:grpSpPr>
       <p:sp>
         <p:nvSpPr>
-          <p:cNvPr id="56" name="Google Shape;56;p4:notes"/>
+          <p:cNvPr id="67" name="Google Shape;67;p3:notes"/>
           <p:cNvSpPr/>
           <p:nvPr>
             <p:ph idx="2" type="sldImg"/>
@@ -2729,7 +2575,7 @@
       </p:sp>
       <p:sp>
         <p:nvSpPr>
-          <p:cNvPr id="57" name="Google Shape;57;p4:notes"/>
+          <p:cNvPr id="68" name="Google Shape;68;p3:notes"/>
           <p:cNvSpPr txBox="1"/>
           <p:nvPr>
             <p:ph idx="1" type="body"/>
@@ -2772,10 +2618,47 @@
               <a:buNone/>
             </a:pPr>
             <a:r>
-              <a:rPr lang="en-US"/>
-              <a:t>skonowlaibyscie nieznane cody QR?</a:t>
-            </a:r>
-            <a:endParaRPr/>
+              <a:rPr lang="en-US" sz="900">
+                <a:solidFill>
+                  <a:schemeClr val="lt1"/>
+                </a:solidFill>
+                <a:highlight>
+                  <a:schemeClr val="dk1"/>
+                </a:highlight>
+                <a:latin typeface="Courier New"/>
+                <a:ea typeface="Courier New"/>
+                <a:cs typeface="Courier New"/>
+                <a:sym typeface="Courier New"/>
+              </a:rPr>
+              <a:t>Ta sama podróż jeszcze raz. Pani Halina wysiada z autobusu. Obok rozkładu wisi kartka. </a:t>
+            </a:r>
+            <a:r>
+              <a:rPr i="1" lang="en-US" sz="900">
+                <a:solidFill>
+                  <a:schemeClr val="lt1"/>
+                </a:solidFill>
+                <a:highlight>
+                  <a:schemeClr val="dk1"/>
+                </a:highlight>
+                <a:latin typeface="Courier New"/>
+                <a:ea typeface="Courier New"/>
+                <a:cs typeface="Courier New"/>
+                <a:sym typeface="Courier New"/>
+              </a:rPr>
+              <a:t>*(pokazać kartkę)*</a:t>
+            </a:r>
+            <a:endParaRPr i="1" sz="900">
+              <a:solidFill>
+                <a:schemeClr val="lt1"/>
+              </a:solidFill>
+              <a:highlight>
+                <a:schemeClr val="dk1"/>
+              </a:highlight>
+              <a:latin typeface="Courier New"/>
+              <a:ea typeface="Courier New"/>
+              <a:cs typeface="Courier New"/>
+              <a:sym typeface="Courier New"/>
+            </a:endParaRPr>
           </a:p>
           <a:p>
             <a:pPr indent="0" lvl="0" marL="0" rtl="0" algn="l">
@@ -2795,6 +2678,51 @@
               <a:buFont typeface="Arial"/>
               <a:buNone/>
             </a:pPr>
+            <a:r>
+              <a:t/>
+            </a:r>
+            <a:endParaRPr sz="900">
+              <a:solidFill>
+                <a:schemeClr val="lt1"/>
+              </a:solidFill>
+              <a:highlight>
+                <a:schemeClr val="dk1"/>
+              </a:highlight>
+              <a:latin typeface="Courier New"/>
+              <a:ea typeface="Courier New"/>
+              <a:cs typeface="Courier New"/>
+              <a:sym typeface="Courier New"/>
+            </a:endParaRPr>
+          </a:p>
+          <a:p>
+            <a:pPr indent="0" lvl="0" marL="0" rtl="0" algn="l">
+              <a:lnSpc>
+                <a:spcPct val="150000"/>
+              </a:lnSpc>
+              <a:spcBef>
+                <a:spcPts val="0"/>
+              </a:spcBef>
+              <a:spcAft>
+                <a:spcPts val="0"/>
+              </a:spcAft>
+              <a:buSzPts val="1100"/>
+              <a:buNone/>
+            </a:pPr>
+            <a:r>
+              <a:rPr lang="en-US" sz="900">
+                <a:solidFill>
+                  <a:schemeClr val="lt1"/>
+                </a:solidFill>
+                <a:highlight>
+                  <a:schemeClr val="dk1"/>
+                </a:highlight>
+                <a:latin typeface="Courier New"/>
+                <a:ea typeface="Courier New"/>
+                <a:cs typeface="Courier New"/>
+                <a:sym typeface="Courier New"/>
+              </a:rPr>
+              <a:t>„Najbliższa toaleta: 250 metrów, około 7 minut pieszo.” Mapka ze strzałką. Bezpłatna, dostępna dla wózków. Godziny otwarcia, a gdy zamknięta, najbliższa czynna. Po polsku i po angielsku.  </a:t>
+            </a:r>
             <a:r>
               <a:rPr lang="en-US" sz="900">
                 <a:solidFill>
@@ -2808,37 +2736,7 @@
                 <a:cs typeface="Courier New"/>
                 <a:sym typeface="Courier New"/>
               </a:rPr>
-              <a:t>Po pierwsze: </a:t>
-            </a:r>
-            <a:r>
-              <a:rPr b="1" lang="en-US" sz="900">
-                <a:solidFill>
-                  <a:srgbClr val="141414"/>
-                </a:solidFill>
-                <a:highlight>
-                  <a:srgbClr val="FCFCFC"/>
-                </a:highlight>
-                <a:latin typeface="Courier New"/>
-                <a:ea typeface="Courier New"/>
-                <a:cs typeface="Courier New"/>
-                <a:sym typeface="Courier New"/>
-              </a:rPr>
-              <a:t>**nie trzeba telefonu**</a:t>
-            </a:r>
-            <a:r>
-              <a:rPr lang="en-US" sz="900">
-                <a:solidFill>
-                  <a:srgbClr val="141414"/>
-                </a:solidFill>
-                <a:highlight>
-                  <a:srgbClr val="FCFCFC"/>
-                </a:highlight>
-                <a:latin typeface="Courier New"/>
-                <a:ea typeface="Courier New"/>
-                <a:cs typeface="Courier New"/>
-                <a:sym typeface="Courier New"/>
-              </a:rPr>
-              <a:t>. Mniej więcej połowa osób po sześćdziesiątce piątce nie korzysta z internetu. </a:t>
+              <a:t>Taką kartkę generujemy automatycznie dla każdego z 4400 słupków w Warszawie, z otwartych danych miasta. Wybieram przystanek… i mam plik do druku.</a:t>
             </a:r>
             <a:endParaRPr sz="900">
               <a:solidFill>
@@ -2864,57 +2762,11 @@
               <a:spcAft>
                 <a:spcPts val="0"/>
               </a:spcAft>
-              <a:buClr>
-                <a:schemeClr val="dk1"/>
-              </a:buClr>
               <a:buSzPts val="1100"/>
-              <a:buFont typeface="Arial"/>
-              <a:buNone/>
-            </a:pPr>
-            <a:r>
-              <a:rPr lang="en-US" sz="900">
-                <a:solidFill>
-                  <a:srgbClr val="141414"/>
-                </a:solidFill>
-                <a:highlight>
-                  <a:srgbClr val="FCFCFC"/>
-                </a:highlight>
-                <a:latin typeface="Courier New"/>
-                <a:ea typeface="Courier New"/>
-                <a:cs typeface="Courier New"/>
-                <a:sym typeface="Courier New"/>
-              </a:rPr>
-              <a:t>Po drugie: </a:t>
-            </a:r>
-            <a:r>
-              <a:rPr b="1" lang="en-US" sz="900">
-                <a:solidFill>
-                  <a:srgbClr val="141414"/>
-                </a:solidFill>
-                <a:highlight>
-                  <a:srgbClr val="FCFCFC"/>
-                </a:highlight>
-                <a:latin typeface="Courier New"/>
-                <a:ea typeface="Courier New"/>
-                <a:cs typeface="Courier New"/>
-                <a:sym typeface="Courier New"/>
-              </a:rPr>
-              <a:t>**jesteśmy tam, gdzie się czeka**</a:t>
-            </a:r>
-            <a:r>
-              <a:rPr lang="en-US" sz="900">
-                <a:solidFill>
-                  <a:srgbClr val="141414"/>
-                </a:solidFill>
-                <a:highlight>
-                  <a:srgbClr val="FCFCFC"/>
-                </a:highlight>
-                <a:latin typeface="Courier New"/>
-                <a:ea typeface="Courier New"/>
-                <a:cs typeface="Courier New"/>
-                <a:sym typeface="Courier New"/>
-              </a:rPr>
-              <a:t>. Każda podróż komunikacją zaczyna się i kończy na przystanku. Tam jest czas, żeby przeczytać kartkę.</a:t>
+              <a:buNone/>
+            </a:pPr>
+            <a:r>
+              <a:t/>
             </a:r>
             <a:endParaRPr sz="900">
               <a:solidFill>
@@ -2931,6 +2783,154 @@
           </a:p>
           <a:p>
             <a:pPr indent="0" lvl="0" marL="0" rtl="0" algn="l">
+              <a:lnSpc>
+                <a:spcPct val="150000"/>
+              </a:lnSpc>
+              <a:spcBef>
+                <a:spcPts val="0"/>
+              </a:spcBef>
+              <a:spcAft>
+                <a:spcPts val="0"/>
+              </a:spcAft>
+              <a:buClr>
+                <a:schemeClr val="dk1"/>
+              </a:buClr>
+              <a:buSzPts val="1100"/>
+              <a:buFont typeface="Arial"/>
+              <a:buNone/>
+            </a:pPr>
+            <a:r>
+              <a:t/>
+            </a:r>
+            <a:endParaRPr sz="900">
+              <a:solidFill>
+                <a:schemeClr val="lt1"/>
+              </a:solidFill>
+              <a:highlight>
+                <a:schemeClr val="dk1"/>
+              </a:highlight>
+              <a:latin typeface="Courier New"/>
+              <a:ea typeface="Courier New"/>
+              <a:cs typeface="Courier New"/>
+              <a:sym typeface="Courier New"/>
+            </a:endParaRPr>
+          </a:p>
+          <a:p>
+            <a:pPr indent="0" lvl="0" marL="0" rtl="0" algn="l">
+              <a:lnSpc>
+                <a:spcPct val="150000"/>
+              </a:lnSpc>
+              <a:spcBef>
+                <a:spcPts val="0"/>
+              </a:spcBef>
+              <a:spcAft>
+                <a:spcPts val="0"/>
+              </a:spcAft>
+              <a:buClr>
+                <a:schemeClr val="dk1"/>
+              </a:buClr>
+              <a:buSzPts val="1100"/>
+              <a:buFont typeface="Arial"/>
+              <a:buNone/>
+            </a:pPr>
+            <a:r>
+              <a:t/>
+            </a:r>
+            <a:endParaRPr sz="900">
+              <a:solidFill>
+                <a:schemeClr val="lt1"/>
+              </a:solidFill>
+              <a:highlight>
+                <a:schemeClr val="dk1"/>
+              </a:highlight>
+              <a:latin typeface="Courier New"/>
+              <a:ea typeface="Courier New"/>
+              <a:cs typeface="Courier New"/>
+              <a:sym typeface="Courier New"/>
+            </a:endParaRPr>
+          </a:p>
+          <a:p>
+            <a:pPr indent="0" lvl="0" marL="0" rtl="0" algn="l">
+              <a:lnSpc>
+                <a:spcPct val="150000"/>
+              </a:lnSpc>
+              <a:spcBef>
+                <a:spcPts val="0"/>
+              </a:spcBef>
+              <a:spcAft>
+                <a:spcPts val="0"/>
+              </a:spcAft>
+              <a:buClr>
+                <a:schemeClr val="dk1"/>
+              </a:buClr>
+              <a:buSzPts val="1100"/>
+              <a:buFont typeface="Arial"/>
+              <a:buNone/>
+            </a:pPr>
+            <a:r>
+              <a:rPr lang="en-US" sz="900">
+                <a:solidFill>
+                  <a:schemeClr val="lt1"/>
+                </a:solidFill>
+                <a:highlight>
+                  <a:schemeClr val="dk1"/>
+                </a:highlight>
+                <a:latin typeface="Courier New"/>
+                <a:ea typeface="Courier New"/>
+                <a:cs typeface="Courier New"/>
+                <a:sym typeface="Courier New"/>
+              </a:rPr>
+              <a:t>Pani Halina wie, że da radę. Więc rano wypiła herbatę i wzięła wodę.</a:t>
+            </a:r>
+            <a:endParaRPr sz="900">
+              <a:solidFill>
+                <a:schemeClr val="lt1"/>
+              </a:solidFill>
+              <a:highlight>
+                <a:schemeClr val="dk1"/>
+              </a:highlight>
+              <a:latin typeface="Courier New"/>
+              <a:ea typeface="Courier New"/>
+              <a:cs typeface="Courier New"/>
+              <a:sym typeface="Courier New"/>
+            </a:endParaRPr>
+          </a:p>
+          <a:p>
+            <a:pPr indent="0" lvl="0" marL="0" rtl="0" algn="l">
+              <a:lnSpc>
+                <a:spcPct val="150000"/>
+              </a:lnSpc>
+              <a:spcBef>
+                <a:spcPts val="0"/>
+              </a:spcBef>
+              <a:spcAft>
+                <a:spcPts val="0"/>
+              </a:spcAft>
+              <a:buClr>
+                <a:schemeClr val="dk1"/>
+              </a:buClr>
+              <a:buSzPts val="1100"/>
+              <a:buFont typeface="Arial"/>
+              <a:buNone/>
+            </a:pPr>
+            <a:r>
+              <a:t/>
+            </a:r>
+            <a:endParaRPr sz="900">
+              <a:solidFill>
+                <a:srgbClr val="141414"/>
+              </a:solidFill>
+              <a:highlight>
+                <a:srgbClr val="FCFCFC"/>
+              </a:highlight>
+              <a:latin typeface="Courier New"/>
+              <a:ea typeface="Courier New"/>
+              <a:cs typeface="Courier New"/>
+              <a:sym typeface="Courier New"/>
+            </a:endParaRPr>
+          </a:p>
+          <a:p>
+            <a:pPr indent="0" lvl="0" marL="0" rtl="0" algn="l">
               <a:spcBef>
                 <a:spcPts val="0"/>
               </a:spcBef>
@@ -2948,7 +2948,7 @@
       </p:sp>
       <p:sp>
         <p:nvSpPr>
-          <p:cNvPr id="58" name="Google Shape;58;p4:notes"/>
+          <p:cNvPr id="69" name="Google Shape;69;p3:notes"/>
           <p:cNvSpPr txBox="1"/>
           <p:nvPr>
             <p:ph idx="12" type="sldNum"/>
@@ -6055,6 +6055,927 @@
         </p:nvSpPr>
         <p:spPr>
           <a:xfrm>
+            <a:off x="4419600" y="250627"/>
+            <a:ext cx="4724400" cy="160800"/>
+          </a:xfrm>
+          <a:prstGeom prst="rect">
+            <a:avLst/>
+          </a:prstGeom>
+          <a:noFill/>
+          <a:ln>
+            <a:noFill/>
+          </a:ln>
+        </p:spPr>
+        <p:txBody>
+          <a:bodyPr anchorCtr="0" anchor="t" bIns="0" lIns="0" spcFirstLastPara="1" rIns="0" wrap="square" tIns="0">
+            <a:noAutofit/>
+          </a:bodyPr>
+          <a:lstStyle/>
+          <a:p>
+            <a:pPr indent="0" lvl="0" marL="0" marR="0" rtl="0" algn="l">
+              <a:lnSpc>
+                <a:spcPct val="112000"/>
+              </a:lnSpc>
+              <a:spcBef>
+                <a:spcPts val="0"/>
+              </a:spcBef>
+              <a:spcAft>
+                <a:spcPts val="0"/>
+              </a:spcAft>
+              <a:buClr>
+                <a:srgbClr val="D8232A"/>
+              </a:buClr>
+              <a:buSzPts val="950"/>
+              <a:buFont typeface="Space Mono"/>
+              <a:buNone/>
+            </a:pPr>
+            <a:r>
+              <a:rPr lang="en-US" sz="950">
+                <a:solidFill>
+                  <a:srgbClr val="D8232A"/>
+                </a:solidFill>
+                <a:latin typeface="Space Mono"/>
+                <a:ea typeface="Space Mono"/>
+                <a:cs typeface="Space Mono"/>
+                <a:sym typeface="Space Mono"/>
+              </a:rPr>
+              <a:t>CO JUZ JEST?</a:t>
+            </a:r>
+            <a:endParaRPr b="0" i="0" sz="950" u="none" cap="none" strike="noStrike">
+              <a:solidFill>
+                <a:schemeClr val="dk1"/>
+              </a:solidFill>
+              <a:latin typeface="Calibri"/>
+              <a:ea typeface="Calibri"/>
+              <a:cs typeface="Calibri"/>
+              <a:sym typeface="Calibri"/>
+            </a:endParaRPr>
+          </a:p>
+        </p:txBody>
+      </p:sp>
+      <p:sp>
+        <p:nvSpPr>
+          <p:cNvPr id="44" name="Google Shape;44;p6"/>
+          <p:cNvSpPr/>
+          <p:nvPr/>
+        </p:nvSpPr>
+        <p:spPr>
+          <a:xfrm>
+            <a:off x="4419600" y="741462"/>
+            <a:ext cx="4267200" cy="723900"/>
+          </a:xfrm>
+          <a:prstGeom prst="rect">
+            <a:avLst/>
+          </a:prstGeom>
+          <a:noFill/>
+          <a:ln>
+            <a:noFill/>
+          </a:ln>
+        </p:spPr>
+        <p:txBody>
+          <a:bodyPr anchorCtr="0" anchor="t" bIns="0" lIns="0" spcFirstLastPara="1" rIns="0" wrap="square" tIns="0">
+            <a:noAutofit/>
+          </a:bodyPr>
+          <a:lstStyle/>
+          <a:p>
+            <a:pPr indent="0" lvl="0" marL="0" marR="0" rtl="0" algn="l">
+              <a:lnSpc>
+                <a:spcPct val="79000"/>
+              </a:lnSpc>
+              <a:spcBef>
+                <a:spcPts val="0"/>
+              </a:spcBef>
+              <a:spcAft>
+                <a:spcPts val="0"/>
+              </a:spcAft>
+              <a:buClr>
+                <a:srgbClr val="1F2B5E"/>
+              </a:buClr>
+              <a:buSzPts val="2900"/>
+              <a:buFont typeface="League Spartan ExtraBold"/>
+              <a:buNone/>
+            </a:pPr>
+            <a:r>
+              <a:rPr b="0" i="0" lang="en-US" sz="2900" u="none" cap="none" strike="noStrike">
+                <a:solidFill>
+                  <a:srgbClr val="1F2B5E"/>
+                </a:solidFill>
+                <a:latin typeface="League Spartan ExtraBold"/>
+                <a:ea typeface="League Spartan ExtraBold"/>
+                <a:cs typeface="League Spartan ExtraBold"/>
+                <a:sym typeface="League Spartan ExtraBold"/>
+              </a:rPr>
+              <a:t>A GOOGLE MAPS? A 350 TABLICZEK Z QR?</a:t>
+            </a:r>
+            <a:endParaRPr b="0" i="0" sz="2900" u="none" cap="none" strike="noStrike">
+              <a:solidFill>
+                <a:schemeClr val="dk1"/>
+              </a:solidFill>
+              <a:latin typeface="Calibri"/>
+              <a:ea typeface="Calibri"/>
+              <a:cs typeface="Calibri"/>
+              <a:sym typeface="Calibri"/>
+            </a:endParaRPr>
+          </a:p>
+        </p:txBody>
+      </p:sp>
+      <p:sp>
+        <p:nvSpPr>
+          <p:cNvPr id="45" name="Google Shape;45;p6"/>
+          <p:cNvSpPr/>
+          <p:nvPr/>
+        </p:nvSpPr>
+        <p:spPr>
+          <a:xfrm>
+            <a:off x="4419600" y="1556742"/>
+            <a:ext cx="2019300" cy="28500"/>
+          </a:xfrm>
+          <a:prstGeom prst="rect">
+            <a:avLst/>
+          </a:prstGeom>
+          <a:solidFill>
+            <a:srgbClr val="1F2B5E"/>
+          </a:solidFill>
+          <a:ln>
+            <a:noFill/>
+          </a:ln>
+        </p:spPr>
+        <p:txBody>
+          <a:bodyPr anchorCtr="0" anchor="ctr" bIns="91425" lIns="91425" spcFirstLastPara="1" rIns="91425" wrap="square" tIns="91425">
+            <a:noAutofit/>
+          </a:bodyPr>
+          <a:lstStyle/>
+          <a:p>
+            <a:pPr indent="0" lvl="0" marL="0" rtl="0" algn="l">
+              <a:spcBef>
+                <a:spcPts val="0"/>
+              </a:spcBef>
+              <a:spcAft>
+                <a:spcPts val="0"/>
+              </a:spcAft>
+              <a:buNone/>
+            </a:pPr>
+            <a:r>
+              <a:t/>
+            </a:r>
+            <a:endParaRPr/>
+          </a:p>
+        </p:txBody>
+      </p:sp>
+      <p:sp>
+        <p:nvSpPr>
+          <p:cNvPr id="46" name="Google Shape;46;p6"/>
+          <p:cNvSpPr/>
+          <p:nvPr/>
+        </p:nvSpPr>
+        <p:spPr>
+          <a:xfrm>
+            <a:off x="4591050" y="1756767"/>
+            <a:ext cx="1676400" cy="534900"/>
+          </a:xfrm>
+          <a:prstGeom prst="rect">
+            <a:avLst/>
+          </a:prstGeom>
+          <a:noFill/>
+          <a:ln>
+            <a:noFill/>
+          </a:ln>
+        </p:spPr>
+        <p:txBody>
+          <a:bodyPr anchorCtr="0" anchor="t" bIns="0" lIns="0" spcFirstLastPara="1" rIns="0" wrap="square" tIns="0">
+            <a:noAutofit/>
+          </a:bodyPr>
+          <a:lstStyle/>
+          <a:p>
+            <a:pPr indent="0" lvl="0" marL="0" marR="0" rtl="0" algn="l">
+              <a:lnSpc>
+                <a:spcPct val="90000"/>
+              </a:lnSpc>
+              <a:spcBef>
+                <a:spcPts val="0"/>
+              </a:spcBef>
+              <a:spcAft>
+                <a:spcPts val="0"/>
+              </a:spcAft>
+              <a:buClr>
+                <a:srgbClr val="1F2B5E"/>
+              </a:buClr>
+              <a:buSzPts val="1950"/>
+              <a:buFont typeface="Saira Condensed"/>
+              <a:buNone/>
+            </a:pPr>
+            <a:r>
+              <a:rPr b="1" i="0" lang="en-US" sz="1950" u="none" cap="none" strike="noStrike">
+                <a:solidFill>
+                  <a:srgbClr val="1F2B5E"/>
+                </a:solidFill>
+                <a:latin typeface="Saira Condensed"/>
+                <a:ea typeface="Saira Condensed"/>
+                <a:cs typeface="Saira Condensed"/>
+                <a:sym typeface="Saira Condensed"/>
+              </a:rPr>
+              <a:t>NIE TRZEBA TELEFONU</a:t>
+            </a:r>
+            <a:endParaRPr b="0" i="0" sz="1950" u="none" cap="none" strike="noStrike">
+              <a:solidFill>
+                <a:schemeClr val="dk1"/>
+              </a:solidFill>
+              <a:latin typeface="Calibri"/>
+              <a:ea typeface="Calibri"/>
+              <a:cs typeface="Calibri"/>
+              <a:sym typeface="Calibri"/>
+            </a:endParaRPr>
+          </a:p>
+        </p:txBody>
+      </p:sp>
+      <p:sp>
+        <p:nvSpPr>
+          <p:cNvPr id="47" name="Google Shape;47;p6"/>
+          <p:cNvSpPr/>
+          <p:nvPr/>
+        </p:nvSpPr>
+        <p:spPr>
+          <a:xfrm>
+            <a:off x="4591050" y="2413099"/>
+            <a:ext cx="1676400" cy="755700"/>
+          </a:xfrm>
+          <a:prstGeom prst="rect">
+            <a:avLst/>
+          </a:prstGeom>
+          <a:noFill/>
+          <a:ln>
+            <a:noFill/>
+          </a:ln>
+        </p:spPr>
+        <p:txBody>
+          <a:bodyPr anchorCtr="0" anchor="t" bIns="0" lIns="0" spcFirstLastPara="1" rIns="0" wrap="square" tIns="0">
+            <a:noAutofit/>
+          </a:bodyPr>
+          <a:lstStyle/>
+          <a:p>
+            <a:pPr indent="0" lvl="0" marL="0" marR="0" rtl="0" algn="l">
+              <a:lnSpc>
+                <a:spcPct val="107000"/>
+              </a:lnSpc>
+              <a:spcBef>
+                <a:spcPts val="0"/>
+              </a:spcBef>
+              <a:spcAft>
+                <a:spcPts val="0"/>
+              </a:spcAft>
+              <a:buClr>
+                <a:srgbClr val="1F2B5E"/>
+              </a:buClr>
+              <a:buSzPts val="1150"/>
+              <a:buFont typeface="Saira Condensed Medium"/>
+              <a:buNone/>
+            </a:pPr>
+            <a:r>
+              <a:rPr lang="en-US" sz="1150">
+                <a:solidFill>
+                  <a:srgbClr val="1F2B5E"/>
+                </a:solidFill>
+                <a:latin typeface="Saira Condensed Medium"/>
+                <a:ea typeface="Saira Condensed Medium"/>
+                <a:cs typeface="Saira Condensed Medium"/>
+                <a:sym typeface="Saira Condensed Medium"/>
+              </a:rPr>
+              <a:t>2 z 5 </a:t>
+            </a:r>
+            <a:r>
+              <a:rPr lang="en-US" sz="1150">
+                <a:solidFill>
+                  <a:srgbClr val="1F2B5E"/>
+                </a:solidFill>
+                <a:latin typeface="Saira Condensed Medium"/>
+                <a:ea typeface="Saira Condensed Medium"/>
+                <a:cs typeface="Saira Condensed Medium"/>
+                <a:sym typeface="Saira Condensed Medium"/>
+              </a:rPr>
+              <a:t>osób</a:t>
+            </a:r>
+            <a:r>
+              <a:rPr lang="en-US" sz="1150">
+                <a:solidFill>
+                  <a:srgbClr val="1F2B5E"/>
+                </a:solidFill>
+                <a:latin typeface="Saira Condensed Medium"/>
+                <a:ea typeface="Saira Condensed Medium"/>
+                <a:cs typeface="Saira Condensed Medium"/>
+                <a:sym typeface="Saira Condensed Medium"/>
+              </a:rPr>
+              <a:t> po 65 roku </a:t>
+            </a:r>
+            <a:r>
+              <a:rPr lang="en-US" sz="1150">
+                <a:solidFill>
+                  <a:srgbClr val="1F2B5E"/>
+                </a:solidFill>
+                <a:latin typeface="Saira Condensed Medium"/>
+                <a:ea typeface="Saira Condensed Medium"/>
+                <a:cs typeface="Saira Condensed Medium"/>
+                <a:sym typeface="Saira Condensed Medium"/>
+              </a:rPr>
+              <a:t>życia</a:t>
+            </a:r>
+            <a:r>
+              <a:rPr lang="en-US" sz="1150">
+                <a:solidFill>
+                  <a:srgbClr val="1F2B5E"/>
+                </a:solidFill>
+                <a:latin typeface="Saira Condensed Medium"/>
+                <a:ea typeface="Saira Condensed Medium"/>
+                <a:cs typeface="Saira Condensed Medium"/>
+                <a:sym typeface="Saira Condensed Medium"/>
+              </a:rPr>
+              <a:t> nie korzysta z internetu</a:t>
+            </a:r>
+            <a:endParaRPr sz="1150">
+              <a:solidFill>
+                <a:srgbClr val="1F2B5E"/>
+              </a:solidFill>
+              <a:latin typeface="Saira Condensed Medium"/>
+              <a:ea typeface="Saira Condensed Medium"/>
+              <a:cs typeface="Saira Condensed Medium"/>
+              <a:sym typeface="Saira Condensed Medium"/>
+            </a:endParaRPr>
+          </a:p>
+          <a:p>
+            <a:pPr indent="0" lvl="0" marL="0" marR="0" rtl="0" algn="l">
+              <a:lnSpc>
+                <a:spcPct val="107000"/>
+              </a:lnSpc>
+              <a:spcBef>
+                <a:spcPts val="0"/>
+              </a:spcBef>
+              <a:spcAft>
+                <a:spcPts val="0"/>
+              </a:spcAft>
+              <a:buClr>
+                <a:srgbClr val="1F2B5E"/>
+              </a:buClr>
+              <a:buSzPts val="1150"/>
+              <a:buFont typeface="Saira Condensed Medium"/>
+              <a:buNone/>
+            </a:pPr>
+            <a:r>
+              <a:t/>
+            </a:r>
+            <a:endParaRPr sz="1150">
+              <a:solidFill>
+                <a:srgbClr val="1F2B5E"/>
+              </a:solidFill>
+              <a:latin typeface="Saira Condensed Medium"/>
+              <a:ea typeface="Saira Condensed Medium"/>
+              <a:cs typeface="Saira Condensed Medium"/>
+              <a:sym typeface="Saira Condensed Medium"/>
+            </a:endParaRPr>
+          </a:p>
+          <a:p>
+            <a:pPr indent="0" lvl="0" marL="0" marR="0" rtl="0" algn="l">
+              <a:lnSpc>
+                <a:spcPct val="107000"/>
+              </a:lnSpc>
+              <a:spcBef>
+                <a:spcPts val="0"/>
+              </a:spcBef>
+              <a:spcAft>
+                <a:spcPts val="0"/>
+              </a:spcAft>
+              <a:buClr>
+                <a:srgbClr val="1F2B5E"/>
+              </a:buClr>
+              <a:buSzPts val="1150"/>
+              <a:buFont typeface="Saira Condensed Medium"/>
+              <a:buNone/>
+            </a:pPr>
+            <a:r>
+              <a:rPr lang="en-US" sz="800">
+                <a:solidFill>
+                  <a:srgbClr val="1F2B5E"/>
+                </a:solidFill>
+                <a:latin typeface="Saira Condensed Medium"/>
+                <a:ea typeface="Saira Condensed Medium"/>
+                <a:cs typeface="Saira Condensed Medium"/>
+                <a:sym typeface="Saira Condensed Medium"/>
+              </a:rPr>
+              <a:t>*Źródło: CBOS,”Korzystanie z internetu w 2026 roku”, 2026</a:t>
+            </a:r>
+            <a:endParaRPr sz="800">
+              <a:solidFill>
+                <a:srgbClr val="1F2B5E"/>
+              </a:solidFill>
+              <a:latin typeface="Saira Condensed Medium"/>
+              <a:ea typeface="Saira Condensed Medium"/>
+              <a:cs typeface="Saira Condensed Medium"/>
+              <a:sym typeface="Saira Condensed Medium"/>
+            </a:endParaRPr>
+          </a:p>
+          <a:p>
+            <a:pPr indent="0" lvl="0" marL="0" marR="0" rtl="0" algn="l">
+              <a:lnSpc>
+                <a:spcPct val="107000"/>
+              </a:lnSpc>
+              <a:spcBef>
+                <a:spcPts val="0"/>
+              </a:spcBef>
+              <a:spcAft>
+                <a:spcPts val="0"/>
+              </a:spcAft>
+              <a:buClr>
+                <a:srgbClr val="1F2B5E"/>
+              </a:buClr>
+              <a:buSzPts val="1150"/>
+              <a:buFont typeface="Saira Condensed Medium"/>
+              <a:buNone/>
+            </a:pPr>
+            <a:r>
+              <a:t/>
+            </a:r>
+            <a:endParaRPr sz="1150">
+              <a:solidFill>
+                <a:srgbClr val="1F2B5E"/>
+              </a:solidFill>
+              <a:latin typeface="Saira Condensed Medium"/>
+              <a:ea typeface="Saira Condensed Medium"/>
+              <a:cs typeface="Saira Condensed Medium"/>
+              <a:sym typeface="Saira Condensed Medium"/>
+            </a:endParaRPr>
+          </a:p>
+          <a:p>
+            <a:pPr indent="0" lvl="0" marL="0" marR="0" rtl="0" algn="l">
+              <a:lnSpc>
+                <a:spcPct val="107000"/>
+              </a:lnSpc>
+              <a:spcBef>
+                <a:spcPts val="0"/>
+              </a:spcBef>
+              <a:spcAft>
+                <a:spcPts val="0"/>
+              </a:spcAft>
+              <a:buClr>
+                <a:srgbClr val="1F2B5E"/>
+              </a:buClr>
+              <a:buSzPts val="1150"/>
+              <a:buFont typeface="Saira Condensed Medium"/>
+              <a:buNone/>
+            </a:pPr>
+            <a:r>
+              <a:t/>
+            </a:r>
+            <a:endParaRPr sz="1150">
+              <a:solidFill>
+                <a:srgbClr val="1F2B5E"/>
+              </a:solidFill>
+              <a:latin typeface="Saira Condensed Medium"/>
+              <a:ea typeface="Saira Condensed Medium"/>
+              <a:cs typeface="Saira Condensed Medium"/>
+              <a:sym typeface="Saira Condensed Medium"/>
+            </a:endParaRPr>
+          </a:p>
+        </p:txBody>
+      </p:sp>
+      <p:sp>
+        <p:nvSpPr>
+          <p:cNvPr id="48" name="Google Shape;48;p6"/>
+          <p:cNvSpPr/>
+          <p:nvPr/>
+        </p:nvSpPr>
+        <p:spPr>
+          <a:xfrm>
+            <a:off x="6667500" y="1556742"/>
+            <a:ext cx="2019300" cy="28500"/>
+          </a:xfrm>
+          <a:prstGeom prst="rect">
+            <a:avLst/>
+          </a:prstGeom>
+          <a:solidFill>
+            <a:srgbClr val="1F2B5E"/>
+          </a:solidFill>
+          <a:ln>
+            <a:noFill/>
+          </a:ln>
+        </p:spPr>
+        <p:txBody>
+          <a:bodyPr anchorCtr="0" anchor="ctr" bIns="91425" lIns="91425" spcFirstLastPara="1" rIns="91425" wrap="square" tIns="91425">
+            <a:noAutofit/>
+          </a:bodyPr>
+          <a:lstStyle/>
+          <a:p>
+            <a:pPr indent="0" lvl="0" marL="0" rtl="0" algn="l">
+              <a:spcBef>
+                <a:spcPts val="0"/>
+              </a:spcBef>
+              <a:spcAft>
+                <a:spcPts val="0"/>
+              </a:spcAft>
+              <a:buNone/>
+            </a:pPr>
+            <a:r>
+              <a:t/>
+            </a:r>
+            <a:endParaRPr/>
+          </a:p>
+        </p:txBody>
+      </p:sp>
+      <p:sp>
+        <p:nvSpPr>
+          <p:cNvPr id="49" name="Google Shape;49;p6"/>
+          <p:cNvSpPr/>
+          <p:nvPr/>
+        </p:nvSpPr>
+        <p:spPr>
+          <a:xfrm>
+            <a:off x="6838950" y="1756767"/>
+            <a:ext cx="1676400" cy="534900"/>
+          </a:xfrm>
+          <a:prstGeom prst="rect">
+            <a:avLst/>
+          </a:prstGeom>
+          <a:noFill/>
+          <a:ln>
+            <a:noFill/>
+          </a:ln>
+        </p:spPr>
+        <p:txBody>
+          <a:bodyPr anchorCtr="0" anchor="t" bIns="0" lIns="0" spcFirstLastPara="1" rIns="0" wrap="square" tIns="0">
+            <a:noAutofit/>
+          </a:bodyPr>
+          <a:lstStyle/>
+          <a:p>
+            <a:pPr indent="0" lvl="0" marL="0" marR="0" rtl="0" algn="l">
+              <a:lnSpc>
+                <a:spcPct val="90000"/>
+              </a:lnSpc>
+              <a:spcBef>
+                <a:spcPts val="0"/>
+              </a:spcBef>
+              <a:spcAft>
+                <a:spcPts val="0"/>
+              </a:spcAft>
+              <a:buClr>
+                <a:srgbClr val="1F2B5E"/>
+              </a:buClr>
+              <a:buSzPts val="1950"/>
+              <a:buFont typeface="Saira Condensed"/>
+              <a:buNone/>
+            </a:pPr>
+            <a:r>
+              <a:rPr b="1" i="0" lang="en-US" sz="1950" u="none" cap="none" strike="noStrike">
+                <a:solidFill>
+                  <a:srgbClr val="1F2B5E"/>
+                </a:solidFill>
+                <a:latin typeface="Saira Condensed"/>
+                <a:ea typeface="Saira Condensed"/>
+                <a:cs typeface="Saira Condensed"/>
+                <a:sym typeface="Saira Condensed"/>
+              </a:rPr>
+              <a:t>JESTEŚMY TAM, GDZIE SIĘ CZEKA</a:t>
+            </a:r>
+            <a:endParaRPr b="0" i="0" sz="1950" u="none" cap="none" strike="noStrike">
+              <a:solidFill>
+                <a:schemeClr val="dk1"/>
+              </a:solidFill>
+              <a:latin typeface="Calibri"/>
+              <a:ea typeface="Calibri"/>
+              <a:cs typeface="Calibri"/>
+              <a:sym typeface="Calibri"/>
+            </a:endParaRPr>
+          </a:p>
+        </p:txBody>
+      </p:sp>
+      <p:sp>
+        <p:nvSpPr>
+          <p:cNvPr id="50" name="Google Shape;50;p6"/>
+          <p:cNvSpPr/>
+          <p:nvPr/>
+        </p:nvSpPr>
+        <p:spPr>
+          <a:xfrm>
+            <a:off x="6838950" y="2413099"/>
+            <a:ext cx="1676400" cy="755700"/>
+          </a:xfrm>
+          <a:prstGeom prst="rect">
+            <a:avLst/>
+          </a:prstGeom>
+          <a:noFill/>
+          <a:ln>
+            <a:noFill/>
+          </a:ln>
+        </p:spPr>
+        <p:txBody>
+          <a:bodyPr anchorCtr="0" anchor="t" bIns="0" lIns="0" spcFirstLastPara="1" rIns="0" wrap="square" tIns="0">
+            <a:noAutofit/>
+          </a:bodyPr>
+          <a:lstStyle/>
+          <a:p>
+            <a:pPr indent="0" lvl="0" marL="0" marR="0" rtl="0" algn="l">
+              <a:lnSpc>
+                <a:spcPct val="107000"/>
+              </a:lnSpc>
+              <a:spcBef>
+                <a:spcPts val="0"/>
+              </a:spcBef>
+              <a:spcAft>
+                <a:spcPts val="0"/>
+              </a:spcAft>
+              <a:buClr>
+                <a:srgbClr val="1F2B5E"/>
+              </a:buClr>
+              <a:buSzPts val="1150"/>
+              <a:buFont typeface="Saira Condensed Medium"/>
+              <a:buNone/>
+            </a:pPr>
+            <a:r>
+              <a:rPr b="0" i="0" lang="en-US" sz="1150" u="none" cap="none" strike="noStrike">
+                <a:solidFill>
+                  <a:srgbClr val="1F2B5E"/>
+                </a:solidFill>
+                <a:latin typeface="Saira Condensed Medium"/>
+                <a:ea typeface="Saira Condensed Medium"/>
+                <a:cs typeface="Saira Condensed Medium"/>
+                <a:sym typeface="Saira Condensed Medium"/>
+              </a:rPr>
+              <a:t>Każda podróż komunikacją zaczyna się i kończy na przystanku. Tam jest czas, żeby przeczytać kartkę.</a:t>
+            </a:r>
+            <a:endParaRPr b="0" i="0" sz="1150" u="none" cap="none" strike="noStrike">
+              <a:solidFill>
+                <a:schemeClr val="dk1"/>
+              </a:solidFill>
+              <a:latin typeface="Calibri"/>
+              <a:ea typeface="Calibri"/>
+              <a:cs typeface="Calibri"/>
+              <a:sym typeface="Calibri"/>
+            </a:endParaRPr>
+          </a:p>
+        </p:txBody>
+      </p:sp>
+      <p:pic>
+        <p:nvPicPr>
+          <p:cNvPr id="51" name="Google Shape;51;p6"/>
+          <p:cNvPicPr preferRelativeResize="0"/>
+          <p:nvPr/>
+        </p:nvPicPr>
+        <p:blipFill>
+          <a:blip r:embed="rId3">
+            <a:alphaModFix/>
+          </a:blip>
+          <a:stretch>
+            <a:fillRect/>
+          </a:stretch>
+        </p:blipFill>
+        <p:spPr>
+          <a:xfrm>
+            <a:off x="142875" y="3440975"/>
+            <a:ext cx="2462675" cy="1628774"/>
+          </a:xfrm>
+          <a:prstGeom prst="rect">
+            <a:avLst/>
+          </a:prstGeom>
+          <a:noFill/>
+          <a:ln>
+            <a:noFill/>
+          </a:ln>
+        </p:spPr>
+      </p:pic>
+      <p:sp>
+        <p:nvSpPr>
+          <p:cNvPr id="52" name="Google Shape;52;p6"/>
+          <p:cNvSpPr/>
+          <p:nvPr/>
+        </p:nvSpPr>
+        <p:spPr>
+          <a:xfrm>
+            <a:off x="485775" y="3740275"/>
+            <a:ext cx="304800" cy="314400"/>
+          </a:xfrm>
+          <a:prstGeom prst="ellipse">
+            <a:avLst/>
+          </a:prstGeom>
+          <a:noFill/>
+          <a:ln cap="flat" cmpd="sng" w="38100">
+            <a:solidFill>
+              <a:srgbClr val="FF0000"/>
+            </a:solidFill>
+            <a:prstDash val="solid"/>
+            <a:round/>
+            <a:headEnd len="sm" w="sm" type="none"/>
+            <a:tailEnd len="sm" w="sm" type="none"/>
+          </a:ln>
+        </p:spPr>
+        <p:txBody>
+          <a:bodyPr anchorCtr="0" anchor="ctr" bIns="91425" lIns="91425" spcFirstLastPara="1" rIns="91425" wrap="square" tIns="91425">
+            <a:noAutofit/>
+          </a:bodyPr>
+          <a:lstStyle/>
+          <a:p>
+            <a:pPr indent="0" lvl="0" marL="0" rtl="0" algn="ctr">
+              <a:spcBef>
+                <a:spcPts val="0"/>
+              </a:spcBef>
+              <a:spcAft>
+                <a:spcPts val="0"/>
+              </a:spcAft>
+              <a:buNone/>
+            </a:pPr>
+            <a:r>
+              <a:t/>
+            </a:r>
+            <a:endParaRPr/>
+          </a:p>
+        </p:txBody>
+      </p:sp>
+      <p:pic>
+        <p:nvPicPr>
+          <p:cNvPr id="53" name="Google Shape;53;p6"/>
+          <p:cNvPicPr preferRelativeResize="0"/>
+          <p:nvPr/>
+        </p:nvPicPr>
+        <p:blipFill>
+          <a:blip r:embed="rId4">
+            <a:alphaModFix/>
+          </a:blip>
+          <a:stretch>
+            <a:fillRect/>
+          </a:stretch>
+        </p:blipFill>
+        <p:spPr>
+          <a:xfrm>
+            <a:off x="2695226" y="2413100"/>
+            <a:ext cx="1463437" cy="2656650"/>
+          </a:xfrm>
+          <a:prstGeom prst="rect">
+            <a:avLst/>
+          </a:prstGeom>
+          <a:noFill/>
+          <a:ln>
+            <a:noFill/>
+          </a:ln>
+        </p:spPr>
+      </p:pic>
+      <p:sp>
+        <p:nvSpPr>
+          <p:cNvPr id="54" name="Google Shape;54;p6"/>
+          <p:cNvSpPr/>
+          <p:nvPr/>
+        </p:nvSpPr>
+        <p:spPr>
+          <a:xfrm>
+            <a:off x="2977575" y="2571050"/>
+            <a:ext cx="1181100" cy="439800"/>
+          </a:xfrm>
+          <a:prstGeom prst="ellipse">
+            <a:avLst/>
+          </a:prstGeom>
+          <a:noFill/>
+          <a:ln cap="flat" cmpd="sng" w="76200">
+            <a:solidFill>
+              <a:srgbClr val="FF0000"/>
+            </a:solidFill>
+            <a:prstDash val="solid"/>
+            <a:round/>
+            <a:headEnd len="sm" w="sm" type="none"/>
+            <a:tailEnd len="sm" w="sm" type="none"/>
+          </a:ln>
+        </p:spPr>
+        <p:txBody>
+          <a:bodyPr anchorCtr="0" anchor="ctr" bIns="91425" lIns="91425" spcFirstLastPara="1" rIns="91425" wrap="square" tIns="91425">
+            <a:noAutofit/>
+          </a:bodyPr>
+          <a:lstStyle/>
+          <a:p>
+            <a:pPr indent="0" lvl="0" marL="0" rtl="0" algn="ctr">
+              <a:spcBef>
+                <a:spcPts val="0"/>
+              </a:spcBef>
+              <a:spcAft>
+                <a:spcPts val="0"/>
+              </a:spcAft>
+              <a:buNone/>
+            </a:pPr>
+            <a:r>
+              <a:t/>
+            </a:r>
+            <a:endParaRPr/>
+          </a:p>
+        </p:txBody>
+      </p:sp>
+      <p:pic>
+        <p:nvPicPr>
+          <p:cNvPr id="55" name="Google Shape;55;p6" title="Screenshot 2026-10-18 at 08.49.55.png"/>
+          <p:cNvPicPr preferRelativeResize="0"/>
+          <p:nvPr/>
+        </p:nvPicPr>
+        <p:blipFill rotWithShape="1">
+          <a:blip r:embed="rId5">
+            <a:alphaModFix/>
+          </a:blip>
+          <a:srcRect b="0" l="1549" r="382" t="0"/>
+          <a:stretch/>
+        </p:blipFill>
+        <p:spPr>
+          <a:xfrm>
+            <a:off x="130150" y="2198950"/>
+            <a:ext cx="2415050" cy="1184000"/>
+          </a:xfrm>
+          <a:prstGeom prst="rect">
+            <a:avLst/>
+          </a:prstGeom>
+          <a:noFill/>
+          <a:ln>
+            <a:noFill/>
+          </a:ln>
+        </p:spPr>
+      </p:pic>
+      <p:pic>
+        <p:nvPicPr>
+          <p:cNvPr id="56" name="Google Shape;56;p6" title="Screenshot 2026-10-18 at 08.51.57.png"/>
+          <p:cNvPicPr preferRelativeResize="0"/>
+          <p:nvPr/>
+        </p:nvPicPr>
+        <p:blipFill>
+          <a:blip r:embed="rId6">
+            <a:alphaModFix/>
+          </a:blip>
+          <a:stretch>
+            <a:fillRect/>
+          </a:stretch>
+        </p:blipFill>
+        <p:spPr>
+          <a:xfrm>
+            <a:off x="123825" y="93525"/>
+            <a:ext cx="4152901" cy="662700"/>
+          </a:xfrm>
+          <a:prstGeom prst="rect">
+            <a:avLst/>
+          </a:prstGeom>
+          <a:noFill/>
+          <a:ln>
+            <a:noFill/>
+          </a:ln>
+        </p:spPr>
+      </p:pic>
+      <p:pic>
+        <p:nvPicPr>
+          <p:cNvPr id="57" name="Google Shape;57;p6"/>
+          <p:cNvPicPr preferRelativeResize="0"/>
+          <p:nvPr/>
+        </p:nvPicPr>
+        <p:blipFill>
+          <a:blip r:embed="rId7">
+            <a:alphaModFix/>
+          </a:blip>
+          <a:stretch>
+            <a:fillRect/>
+          </a:stretch>
+        </p:blipFill>
+        <p:spPr>
+          <a:xfrm>
+            <a:off x="104775" y="814250"/>
+            <a:ext cx="3392493" cy="1326675"/>
+          </a:xfrm>
+          <a:prstGeom prst="rect">
+            <a:avLst/>
+          </a:prstGeom>
+          <a:noFill/>
+          <a:ln>
+            <a:noFill/>
+          </a:ln>
+        </p:spPr>
+      </p:pic>
+    </p:spTree>
+  </p:cSld>
+  <p:clrMapOvr>
+    <a:masterClrMapping/>
+  </p:clrMapOvr>
+</p:sld>
+</file>
+
+<file path=ppt/slides/slide4.xml><?xml version="1.0" encoding="utf-8"?>
+<p:sld xmlns:a="http://schemas.openxmlformats.org/drawingml/2006/main" xmlns:r="http://schemas.openxmlformats.org/officeDocument/2006/relationships" xmlns:mc="http://schemas.openxmlformats.org/markup-compatibility/2006" xmlns:mv="urn:schemas-microsoft-com:mac:vml" xmlns:p="http://schemas.openxmlformats.org/presentationml/2006/main" xmlns:c="http://schemas.openxmlformats.org/drawingml/2006/chart" xmlns:dgm="http://schemas.openxmlformats.org/drawingml/2006/diagram" xmlns:o="urn:schemas-microsoft-com:office:office" xmlns:v="urn:schemas-microsoft-com:vml" xmlns:pvml="urn:schemas-microsoft-com:office:powerpoint" xmlns:com="http://schemas.openxmlformats.org/drawingml/2006/compatibility" xmlns:p14="http://schemas.microsoft.com/office/powerpoint/2010/main" xmlns:p15="http://schemas.microsoft.com/office/powerpoint/2012/main" xmlns:ahyp="http://schemas.microsoft.com/office/drawing/2018/hyperlinkcolor">
+  <p:cSld>
+    <p:spTree>
+      <p:nvGrpSpPr>
+        <p:cNvPr id="62" name="Shape 62"/>
+        <p:cNvGrpSpPr/>
+        <p:nvPr/>
+      </p:nvGrpSpPr>
+      <p:grpSpPr>
+        <a:xfrm>
+          <a:off x="0" y="0"/>
+          <a:ext cx="0" cy="0"/>
+          <a:chOff x="0" y="0"/>
+          <a:chExt cx="0" cy="0"/>
+        </a:xfrm>
+      </p:grpSpPr>
+      <p:sp>
+        <p:nvSpPr>
+          <p:cNvPr id="63" name="Google Shape;63;p7"/>
+          <p:cNvSpPr/>
+          <p:nvPr/>
+        </p:nvSpPr>
+        <p:spPr>
+          <a:xfrm>
             <a:off x="457200" y="457200"/>
             <a:ext cx="8686800" cy="160734"/>
           </a:xfrm>
@@ -6115,7 +7036,7 @@
       </p:sp>
       <p:sp>
         <p:nvSpPr>
-          <p:cNvPr id="44" name="Google Shape;44;p6"/>
+          <p:cNvPr id="64" name="Google Shape;64;p7"/>
           <p:cNvSpPr/>
           <p:nvPr/>
         </p:nvSpPr>
@@ -6181,7 +7102,7 @@
       </p:sp>
       <p:pic>
         <p:nvPicPr>
-          <p:cNvPr id="45" name="Google Shape;45;p6" title="Aplikacja.mp4">
+          <p:cNvPr id="65" name="Google Shape;65;p7" title="Aplikacja.mp4">
             <a:hlinkClick r:id="rId3"/>
           </p:cNvPr>
           <p:cNvPicPr preferRelativeResize="0"/>
@@ -6248,7 +7169,7 @@
                                           </p:stCondLst>
                                         </p:cTn>
                                         <p:tgtEl>
-                                          <p:spTgt spid="45"/>
+                                          <p:spTgt spid="65"/>
                                         </p:tgtEl>
                                         <p:attrNameLst>
                                           <p:attrName>style.visibility</p:attrName>
@@ -6262,7 +7183,7 @@
                                       <p:cBhvr>
                                         <p:cTn dur="1000"/>
                                         <p:tgtEl>
-                                          <p:spTgt spid="45"/>
+                                          <p:spTgt spid="65"/>
                                         </p:tgtEl>
                                       </p:cBhvr>
                                     </p:animEffect>
@@ -6300,12 +7221,12 @@
 </p:sld>
 </file>
 
-<file path=ppt/slides/slide4.xml><?xml version="1.0" encoding="utf-8"?>
+<file path=ppt/slides/slide5.xml><?xml version="1.0" encoding="utf-8"?>
 <p:sld xmlns:a="http://schemas.openxmlformats.org/drawingml/2006/main" xmlns:r="http://schemas.openxmlformats.org/officeDocument/2006/relationships" xmlns:mc="http://schemas.openxmlformats.org/markup-compatibility/2006" xmlns:mv="urn:schemas-microsoft-com:mac:vml" xmlns:p="http://schemas.openxmlformats.org/presentationml/2006/main" xmlns:c="http://schemas.openxmlformats.org/drawingml/2006/chart" xmlns:dgm="http://schemas.openxmlformats.org/drawingml/2006/diagram" xmlns:o="urn:schemas-microsoft-com:office:office" xmlns:v="urn:schemas-microsoft-com:vml" xmlns:pvml="urn:schemas-microsoft-com:office:powerpoint" xmlns:com="http://schemas.openxmlformats.org/drawingml/2006/compatibility" xmlns:p14="http://schemas.microsoft.com/office/powerpoint/2010/main" xmlns:p15="http://schemas.microsoft.com/office/powerpoint/2012/main" xmlns:ahyp="http://schemas.microsoft.com/office/drawing/2018/hyperlinkcolor">
   <p:cSld>
     <p:spTree>
       <p:nvGrpSpPr>
-        <p:cNvPr id="50" name="Shape 50"/>
+        <p:cNvPr id="70" name="Shape 70"/>
         <p:cNvGrpSpPr/>
         <p:nvPr/>
       </p:nvGrpSpPr>
@@ -6319,7 +7240,7 @@
       </p:grpSpPr>
       <p:sp>
         <p:nvSpPr>
-          <p:cNvPr id="51" name="Google Shape;51;p7"/>
+          <p:cNvPr id="71" name="Google Shape;71;p8"/>
           <p:cNvSpPr/>
           <p:nvPr/>
         </p:nvSpPr>
@@ -6385,7 +7306,7 @@
       </p:sp>
       <p:sp>
         <p:nvSpPr>
-          <p:cNvPr id="52" name="Google Shape;52;p7"/>
+          <p:cNvPr id="72" name="Google Shape;72;p8"/>
           <p:cNvSpPr/>
           <p:nvPr/>
         </p:nvSpPr>
@@ -6451,7 +7372,7 @@
       </p:sp>
       <p:sp>
         <p:nvSpPr>
-          <p:cNvPr id="53" name="Google Shape;53;p7"/>
+          <p:cNvPr id="73" name="Google Shape;73;p8"/>
           <p:cNvSpPr/>
           <p:nvPr/>
         </p:nvSpPr>
@@ -6639,7 +7560,7 @@
       </p:sp>
       <p:pic>
         <p:nvPicPr>
-          <p:cNvPr id="54" name="Google Shape;54;p7"/>
+          <p:cNvPr id="74" name="Google Shape;74;p8"/>
           <p:cNvPicPr preferRelativeResize="0"/>
           <p:nvPr/>
         </p:nvPicPr>
@@ -6654,927 +7575,6 @@
           <a:xfrm>
             <a:off x="4524375" y="202450"/>
             <a:ext cx="3429000" cy="4738600"/>
-          </a:xfrm>
-          <a:prstGeom prst="rect">
-            <a:avLst/>
-          </a:prstGeom>
-          <a:noFill/>
-          <a:ln>
-            <a:noFill/>
-          </a:ln>
-        </p:spPr>
-      </p:pic>
-    </p:spTree>
-  </p:cSld>
-  <p:clrMapOvr>
-    <a:masterClrMapping/>
-  </p:clrMapOvr>
-</p:sld>
-</file>
-
-<file path=ppt/slides/slide5.xml><?xml version="1.0" encoding="utf-8"?>
-<p:sld xmlns:a="http://schemas.openxmlformats.org/drawingml/2006/main" xmlns:r="http://schemas.openxmlformats.org/officeDocument/2006/relationships" xmlns:mc="http://schemas.openxmlformats.org/markup-compatibility/2006" xmlns:mv="urn:schemas-microsoft-com:mac:vml" xmlns:p="http://schemas.openxmlformats.org/presentationml/2006/main" xmlns:c="http://schemas.openxmlformats.org/drawingml/2006/chart" xmlns:dgm="http://schemas.openxmlformats.org/drawingml/2006/diagram" xmlns:o="urn:schemas-microsoft-com:office:office" xmlns:v="urn:schemas-microsoft-com:vml" xmlns:pvml="urn:schemas-microsoft-com:office:powerpoint" xmlns:com="http://schemas.openxmlformats.org/drawingml/2006/compatibility" xmlns:p14="http://schemas.microsoft.com/office/powerpoint/2010/main" xmlns:p15="http://schemas.microsoft.com/office/powerpoint/2012/main" xmlns:ahyp="http://schemas.microsoft.com/office/drawing/2018/hyperlinkcolor">
-  <p:cSld>
-    <p:spTree>
-      <p:nvGrpSpPr>
-        <p:cNvPr id="59" name="Shape 59"/>
-        <p:cNvGrpSpPr/>
-        <p:nvPr/>
-      </p:nvGrpSpPr>
-      <p:grpSpPr>
-        <a:xfrm>
-          <a:off x="0" y="0"/>
-          <a:ext cx="0" cy="0"/>
-          <a:chOff x="0" y="0"/>
-          <a:chExt cx="0" cy="0"/>
-        </a:xfrm>
-      </p:grpSpPr>
-      <p:sp>
-        <p:nvSpPr>
-          <p:cNvPr id="60" name="Google Shape;60;p8"/>
-          <p:cNvSpPr/>
-          <p:nvPr/>
-        </p:nvSpPr>
-        <p:spPr>
-          <a:xfrm>
-            <a:off x="4419600" y="250627"/>
-            <a:ext cx="4724400" cy="160800"/>
-          </a:xfrm>
-          <a:prstGeom prst="rect">
-            <a:avLst/>
-          </a:prstGeom>
-          <a:noFill/>
-          <a:ln>
-            <a:noFill/>
-          </a:ln>
-        </p:spPr>
-        <p:txBody>
-          <a:bodyPr anchorCtr="0" anchor="t" bIns="0" lIns="0" spcFirstLastPara="1" rIns="0" wrap="square" tIns="0">
-            <a:noAutofit/>
-          </a:bodyPr>
-          <a:lstStyle/>
-          <a:p>
-            <a:pPr indent="0" lvl="0" marL="0" marR="0" rtl="0" algn="l">
-              <a:lnSpc>
-                <a:spcPct val="112000"/>
-              </a:lnSpc>
-              <a:spcBef>
-                <a:spcPts val="0"/>
-              </a:spcBef>
-              <a:spcAft>
-                <a:spcPts val="0"/>
-              </a:spcAft>
-              <a:buClr>
-                <a:srgbClr val="D8232A"/>
-              </a:buClr>
-              <a:buSzPts val="950"/>
-              <a:buFont typeface="Space Mono"/>
-              <a:buNone/>
-            </a:pPr>
-            <a:r>
-              <a:rPr b="0" i="0" lang="en-US" sz="950" u="none" cap="none" strike="noStrike">
-                <a:solidFill>
-                  <a:srgbClr val="D8232A"/>
-                </a:solidFill>
-                <a:latin typeface="Space Mono"/>
-                <a:ea typeface="Space Mono"/>
-                <a:cs typeface="Space Mono"/>
-                <a:sym typeface="Space Mono"/>
-              </a:rPr>
-              <a:t>CZYM SIĘ RÓŻNIMY</a:t>
-            </a:r>
-            <a:endParaRPr b="0" i="0" sz="950" u="none" cap="none" strike="noStrike">
-              <a:solidFill>
-                <a:schemeClr val="dk1"/>
-              </a:solidFill>
-              <a:latin typeface="Calibri"/>
-              <a:ea typeface="Calibri"/>
-              <a:cs typeface="Calibri"/>
-              <a:sym typeface="Calibri"/>
-            </a:endParaRPr>
-          </a:p>
-        </p:txBody>
-      </p:sp>
-      <p:sp>
-        <p:nvSpPr>
-          <p:cNvPr id="61" name="Google Shape;61;p8"/>
-          <p:cNvSpPr/>
-          <p:nvPr/>
-        </p:nvSpPr>
-        <p:spPr>
-          <a:xfrm>
-            <a:off x="4419600" y="741462"/>
-            <a:ext cx="4267200" cy="723900"/>
-          </a:xfrm>
-          <a:prstGeom prst="rect">
-            <a:avLst/>
-          </a:prstGeom>
-          <a:noFill/>
-          <a:ln>
-            <a:noFill/>
-          </a:ln>
-        </p:spPr>
-        <p:txBody>
-          <a:bodyPr anchorCtr="0" anchor="t" bIns="0" lIns="0" spcFirstLastPara="1" rIns="0" wrap="square" tIns="0">
-            <a:noAutofit/>
-          </a:bodyPr>
-          <a:lstStyle/>
-          <a:p>
-            <a:pPr indent="0" lvl="0" marL="0" marR="0" rtl="0" algn="l">
-              <a:lnSpc>
-                <a:spcPct val="79000"/>
-              </a:lnSpc>
-              <a:spcBef>
-                <a:spcPts val="0"/>
-              </a:spcBef>
-              <a:spcAft>
-                <a:spcPts val="0"/>
-              </a:spcAft>
-              <a:buClr>
-                <a:srgbClr val="1F2B5E"/>
-              </a:buClr>
-              <a:buSzPts val="2900"/>
-              <a:buFont typeface="League Spartan ExtraBold"/>
-              <a:buNone/>
-            </a:pPr>
-            <a:r>
-              <a:rPr b="0" i="0" lang="en-US" sz="2900" u="none" cap="none" strike="noStrike">
-                <a:solidFill>
-                  <a:srgbClr val="1F2B5E"/>
-                </a:solidFill>
-                <a:latin typeface="League Spartan ExtraBold"/>
-                <a:ea typeface="League Spartan ExtraBold"/>
-                <a:cs typeface="League Spartan ExtraBold"/>
-                <a:sym typeface="League Spartan ExtraBold"/>
-              </a:rPr>
-              <a:t>A GOOGLE MAPS? A 350 TABLICZEK Z QR?</a:t>
-            </a:r>
-            <a:endParaRPr b="0" i="0" sz="2900" u="none" cap="none" strike="noStrike">
-              <a:solidFill>
-                <a:schemeClr val="dk1"/>
-              </a:solidFill>
-              <a:latin typeface="Calibri"/>
-              <a:ea typeface="Calibri"/>
-              <a:cs typeface="Calibri"/>
-              <a:sym typeface="Calibri"/>
-            </a:endParaRPr>
-          </a:p>
-        </p:txBody>
-      </p:sp>
-      <p:sp>
-        <p:nvSpPr>
-          <p:cNvPr id="62" name="Google Shape;62;p8"/>
-          <p:cNvSpPr/>
-          <p:nvPr/>
-        </p:nvSpPr>
-        <p:spPr>
-          <a:xfrm>
-            <a:off x="4419600" y="1556742"/>
-            <a:ext cx="2019300" cy="28500"/>
-          </a:xfrm>
-          <a:prstGeom prst="rect">
-            <a:avLst/>
-          </a:prstGeom>
-          <a:solidFill>
-            <a:srgbClr val="1F2B5E"/>
-          </a:solidFill>
-          <a:ln>
-            <a:noFill/>
-          </a:ln>
-        </p:spPr>
-        <p:txBody>
-          <a:bodyPr anchorCtr="0" anchor="ctr" bIns="91425" lIns="91425" spcFirstLastPara="1" rIns="91425" wrap="square" tIns="91425">
-            <a:noAutofit/>
-          </a:bodyPr>
-          <a:lstStyle/>
-          <a:p>
-            <a:pPr indent="0" lvl="0" marL="0" rtl="0" algn="l">
-              <a:spcBef>
-                <a:spcPts val="0"/>
-              </a:spcBef>
-              <a:spcAft>
-                <a:spcPts val="0"/>
-              </a:spcAft>
-              <a:buNone/>
-            </a:pPr>
-            <a:r>
-              <a:t/>
-            </a:r>
-            <a:endParaRPr/>
-          </a:p>
-        </p:txBody>
-      </p:sp>
-      <p:sp>
-        <p:nvSpPr>
-          <p:cNvPr id="63" name="Google Shape;63;p8"/>
-          <p:cNvSpPr/>
-          <p:nvPr/>
-        </p:nvSpPr>
-        <p:spPr>
-          <a:xfrm>
-            <a:off x="4591050" y="1756767"/>
-            <a:ext cx="1676400" cy="534900"/>
-          </a:xfrm>
-          <a:prstGeom prst="rect">
-            <a:avLst/>
-          </a:prstGeom>
-          <a:noFill/>
-          <a:ln>
-            <a:noFill/>
-          </a:ln>
-        </p:spPr>
-        <p:txBody>
-          <a:bodyPr anchorCtr="0" anchor="t" bIns="0" lIns="0" spcFirstLastPara="1" rIns="0" wrap="square" tIns="0">
-            <a:noAutofit/>
-          </a:bodyPr>
-          <a:lstStyle/>
-          <a:p>
-            <a:pPr indent="0" lvl="0" marL="0" marR="0" rtl="0" algn="l">
-              <a:lnSpc>
-                <a:spcPct val="90000"/>
-              </a:lnSpc>
-              <a:spcBef>
-                <a:spcPts val="0"/>
-              </a:spcBef>
-              <a:spcAft>
-                <a:spcPts val="0"/>
-              </a:spcAft>
-              <a:buClr>
-                <a:srgbClr val="1F2B5E"/>
-              </a:buClr>
-              <a:buSzPts val="1950"/>
-              <a:buFont typeface="Saira Condensed"/>
-              <a:buNone/>
-            </a:pPr>
-            <a:r>
-              <a:rPr b="1" i="0" lang="en-US" sz="1950" u="none" cap="none" strike="noStrike">
-                <a:solidFill>
-                  <a:srgbClr val="1F2B5E"/>
-                </a:solidFill>
-                <a:latin typeface="Saira Condensed"/>
-                <a:ea typeface="Saira Condensed"/>
-                <a:cs typeface="Saira Condensed"/>
-                <a:sym typeface="Saira Condensed"/>
-              </a:rPr>
-              <a:t>NIE TRZEBA TELEFONU</a:t>
-            </a:r>
-            <a:endParaRPr b="0" i="0" sz="1950" u="none" cap="none" strike="noStrike">
-              <a:solidFill>
-                <a:schemeClr val="dk1"/>
-              </a:solidFill>
-              <a:latin typeface="Calibri"/>
-              <a:ea typeface="Calibri"/>
-              <a:cs typeface="Calibri"/>
-              <a:sym typeface="Calibri"/>
-            </a:endParaRPr>
-          </a:p>
-        </p:txBody>
-      </p:sp>
-      <p:sp>
-        <p:nvSpPr>
-          <p:cNvPr id="64" name="Google Shape;64;p8"/>
-          <p:cNvSpPr/>
-          <p:nvPr/>
-        </p:nvSpPr>
-        <p:spPr>
-          <a:xfrm>
-            <a:off x="4591050" y="2413099"/>
-            <a:ext cx="1676400" cy="755700"/>
-          </a:xfrm>
-          <a:prstGeom prst="rect">
-            <a:avLst/>
-          </a:prstGeom>
-          <a:noFill/>
-          <a:ln>
-            <a:noFill/>
-          </a:ln>
-        </p:spPr>
-        <p:txBody>
-          <a:bodyPr anchorCtr="0" anchor="t" bIns="0" lIns="0" spcFirstLastPara="1" rIns="0" wrap="square" tIns="0">
-            <a:noAutofit/>
-          </a:bodyPr>
-          <a:lstStyle/>
-          <a:p>
-            <a:pPr indent="0" lvl="0" marL="0" marR="0" rtl="0" algn="l">
-              <a:lnSpc>
-                <a:spcPct val="107000"/>
-              </a:lnSpc>
-              <a:spcBef>
-                <a:spcPts val="0"/>
-              </a:spcBef>
-              <a:spcAft>
-                <a:spcPts val="0"/>
-              </a:spcAft>
-              <a:buClr>
-                <a:srgbClr val="1F2B5E"/>
-              </a:buClr>
-              <a:buSzPts val="1150"/>
-              <a:buFont typeface="Saira Condensed Medium"/>
-              <a:buNone/>
-            </a:pPr>
-            <a:r>
-              <a:rPr lang="en-US" sz="1150">
-                <a:solidFill>
-                  <a:srgbClr val="1F2B5E"/>
-                </a:solidFill>
-                <a:latin typeface="Saira Condensed Medium"/>
-                <a:ea typeface="Saira Condensed Medium"/>
-                <a:cs typeface="Saira Condensed Medium"/>
-                <a:sym typeface="Saira Condensed Medium"/>
-              </a:rPr>
-              <a:t>2 z 5 </a:t>
-            </a:r>
-            <a:r>
-              <a:rPr lang="en-US" sz="1150">
-                <a:solidFill>
-                  <a:srgbClr val="1F2B5E"/>
-                </a:solidFill>
-                <a:latin typeface="Saira Condensed Medium"/>
-                <a:ea typeface="Saira Condensed Medium"/>
-                <a:cs typeface="Saira Condensed Medium"/>
-                <a:sym typeface="Saira Condensed Medium"/>
-              </a:rPr>
-              <a:t>osób</a:t>
-            </a:r>
-            <a:r>
-              <a:rPr lang="en-US" sz="1150">
-                <a:solidFill>
-                  <a:srgbClr val="1F2B5E"/>
-                </a:solidFill>
-                <a:latin typeface="Saira Condensed Medium"/>
-                <a:ea typeface="Saira Condensed Medium"/>
-                <a:cs typeface="Saira Condensed Medium"/>
-                <a:sym typeface="Saira Condensed Medium"/>
-              </a:rPr>
-              <a:t> po 65 roku </a:t>
-            </a:r>
-            <a:r>
-              <a:rPr lang="en-US" sz="1150">
-                <a:solidFill>
-                  <a:srgbClr val="1F2B5E"/>
-                </a:solidFill>
-                <a:latin typeface="Saira Condensed Medium"/>
-                <a:ea typeface="Saira Condensed Medium"/>
-                <a:cs typeface="Saira Condensed Medium"/>
-                <a:sym typeface="Saira Condensed Medium"/>
-              </a:rPr>
-              <a:t>życia</a:t>
-            </a:r>
-            <a:r>
-              <a:rPr lang="en-US" sz="1150">
-                <a:solidFill>
-                  <a:srgbClr val="1F2B5E"/>
-                </a:solidFill>
-                <a:latin typeface="Saira Condensed Medium"/>
-                <a:ea typeface="Saira Condensed Medium"/>
-                <a:cs typeface="Saira Condensed Medium"/>
-                <a:sym typeface="Saira Condensed Medium"/>
-              </a:rPr>
-              <a:t> nie korzysta z internetu</a:t>
-            </a:r>
-            <a:endParaRPr sz="1150">
-              <a:solidFill>
-                <a:srgbClr val="1F2B5E"/>
-              </a:solidFill>
-              <a:latin typeface="Saira Condensed Medium"/>
-              <a:ea typeface="Saira Condensed Medium"/>
-              <a:cs typeface="Saira Condensed Medium"/>
-              <a:sym typeface="Saira Condensed Medium"/>
-            </a:endParaRPr>
-          </a:p>
-          <a:p>
-            <a:pPr indent="0" lvl="0" marL="0" marR="0" rtl="0" algn="l">
-              <a:lnSpc>
-                <a:spcPct val="107000"/>
-              </a:lnSpc>
-              <a:spcBef>
-                <a:spcPts val="0"/>
-              </a:spcBef>
-              <a:spcAft>
-                <a:spcPts val="0"/>
-              </a:spcAft>
-              <a:buClr>
-                <a:srgbClr val="1F2B5E"/>
-              </a:buClr>
-              <a:buSzPts val="1150"/>
-              <a:buFont typeface="Saira Condensed Medium"/>
-              <a:buNone/>
-            </a:pPr>
-            <a:r>
-              <a:t/>
-            </a:r>
-            <a:endParaRPr sz="1150">
-              <a:solidFill>
-                <a:srgbClr val="1F2B5E"/>
-              </a:solidFill>
-              <a:latin typeface="Saira Condensed Medium"/>
-              <a:ea typeface="Saira Condensed Medium"/>
-              <a:cs typeface="Saira Condensed Medium"/>
-              <a:sym typeface="Saira Condensed Medium"/>
-            </a:endParaRPr>
-          </a:p>
-          <a:p>
-            <a:pPr indent="0" lvl="0" marL="0" marR="0" rtl="0" algn="l">
-              <a:lnSpc>
-                <a:spcPct val="107000"/>
-              </a:lnSpc>
-              <a:spcBef>
-                <a:spcPts val="0"/>
-              </a:spcBef>
-              <a:spcAft>
-                <a:spcPts val="0"/>
-              </a:spcAft>
-              <a:buClr>
-                <a:srgbClr val="1F2B5E"/>
-              </a:buClr>
-              <a:buSzPts val="1150"/>
-              <a:buFont typeface="Saira Condensed Medium"/>
-              <a:buNone/>
-            </a:pPr>
-            <a:r>
-              <a:rPr lang="en-US" sz="800">
-                <a:solidFill>
-                  <a:srgbClr val="1F2B5E"/>
-                </a:solidFill>
-                <a:latin typeface="Saira Condensed Medium"/>
-                <a:ea typeface="Saira Condensed Medium"/>
-                <a:cs typeface="Saira Condensed Medium"/>
-                <a:sym typeface="Saira Condensed Medium"/>
-              </a:rPr>
-              <a:t>*Źródło: CBOS,”Korzystanie z internetu w 2026 roku”, 2026</a:t>
-            </a:r>
-            <a:endParaRPr sz="800">
-              <a:solidFill>
-                <a:srgbClr val="1F2B5E"/>
-              </a:solidFill>
-              <a:latin typeface="Saira Condensed Medium"/>
-              <a:ea typeface="Saira Condensed Medium"/>
-              <a:cs typeface="Saira Condensed Medium"/>
-              <a:sym typeface="Saira Condensed Medium"/>
-            </a:endParaRPr>
-          </a:p>
-          <a:p>
-            <a:pPr indent="0" lvl="0" marL="0" marR="0" rtl="0" algn="l">
-              <a:lnSpc>
-                <a:spcPct val="107000"/>
-              </a:lnSpc>
-              <a:spcBef>
-                <a:spcPts val="0"/>
-              </a:spcBef>
-              <a:spcAft>
-                <a:spcPts val="0"/>
-              </a:spcAft>
-              <a:buClr>
-                <a:srgbClr val="1F2B5E"/>
-              </a:buClr>
-              <a:buSzPts val="1150"/>
-              <a:buFont typeface="Saira Condensed Medium"/>
-              <a:buNone/>
-            </a:pPr>
-            <a:r>
-              <a:t/>
-            </a:r>
-            <a:endParaRPr sz="1150">
-              <a:solidFill>
-                <a:srgbClr val="1F2B5E"/>
-              </a:solidFill>
-              <a:latin typeface="Saira Condensed Medium"/>
-              <a:ea typeface="Saira Condensed Medium"/>
-              <a:cs typeface="Saira Condensed Medium"/>
-              <a:sym typeface="Saira Condensed Medium"/>
-            </a:endParaRPr>
-          </a:p>
-          <a:p>
-            <a:pPr indent="0" lvl="0" marL="0" marR="0" rtl="0" algn="l">
-              <a:lnSpc>
-                <a:spcPct val="107000"/>
-              </a:lnSpc>
-              <a:spcBef>
-                <a:spcPts val="0"/>
-              </a:spcBef>
-              <a:spcAft>
-                <a:spcPts val="0"/>
-              </a:spcAft>
-              <a:buClr>
-                <a:srgbClr val="1F2B5E"/>
-              </a:buClr>
-              <a:buSzPts val="1150"/>
-              <a:buFont typeface="Saira Condensed Medium"/>
-              <a:buNone/>
-            </a:pPr>
-            <a:r>
-              <a:t/>
-            </a:r>
-            <a:endParaRPr sz="1150">
-              <a:solidFill>
-                <a:srgbClr val="1F2B5E"/>
-              </a:solidFill>
-              <a:latin typeface="Saira Condensed Medium"/>
-              <a:ea typeface="Saira Condensed Medium"/>
-              <a:cs typeface="Saira Condensed Medium"/>
-              <a:sym typeface="Saira Condensed Medium"/>
-            </a:endParaRPr>
-          </a:p>
-        </p:txBody>
-      </p:sp>
-      <p:sp>
-        <p:nvSpPr>
-          <p:cNvPr id="65" name="Google Shape;65;p8"/>
-          <p:cNvSpPr/>
-          <p:nvPr/>
-        </p:nvSpPr>
-        <p:spPr>
-          <a:xfrm>
-            <a:off x="6667500" y="1556742"/>
-            <a:ext cx="2019300" cy="28500"/>
-          </a:xfrm>
-          <a:prstGeom prst="rect">
-            <a:avLst/>
-          </a:prstGeom>
-          <a:solidFill>
-            <a:srgbClr val="1F2B5E"/>
-          </a:solidFill>
-          <a:ln>
-            <a:noFill/>
-          </a:ln>
-        </p:spPr>
-        <p:txBody>
-          <a:bodyPr anchorCtr="0" anchor="ctr" bIns="91425" lIns="91425" spcFirstLastPara="1" rIns="91425" wrap="square" tIns="91425">
-            <a:noAutofit/>
-          </a:bodyPr>
-          <a:lstStyle/>
-          <a:p>
-            <a:pPr indent="0" lvl="0" marL="0" rtl="0" algn="l">
-              <a:spcBef>
-                <a:spcPts val="0"/>
-              </a:spcBef>
-              <a:spcAft>
-                <a:spcPts val="0"/>
-              </a:spcAft>
-              <a:buNone/>
-            </a:pPr>
-            <a:r>
-              <a:t/>
-            </a:r>
-            <a:endParaRPr/>
-          </a:p>
-        </p:txBody>
-      </p:sp>
-      <p:sp>
-        <p:nvSpPr>
-          <p:cNvPr id="66" name="Google Shape;66;p8"/>
-          <p:cNvSpPr/>
-          <p:nvPr/>
-        </p:nvSpPr>
-        <p:spPr>
-          <a:xfrm>
-            <a:off x="6838950" y="1756767"/>
-            <a:ext cx="1676400" cy="534900"/>
-          </a:xfrm>
-          <a:prstGeom prst="rect">
-            <a:avLst/>
-          </a:prstGeom>
-          <a:noFill/>
-          <a:ln>
-            <a:noFill/>
-          </a:ln>
-        </p:spPr>
-        <p:txBody>
-          <a:bodyPr anchorCtr="0" anchor="t" bIns="0" lIns="0" spcFirstLastPara="1" rIns="0" wrap="square" tIns="0">
-            <a:noAutofit/>
-          </a:bodyPr>
-          <a:lstStyle/>
-          <a:p>
-            <a:pPr indent="0" lvl="0" marL="0" marR="0" rtl="0" algn="l">
-              <a:lnSpc>
-                <a:spcPct val="90000"/>
-              </a:lnSpc>
-              <a:spcBef>
-                <a:spcPts val="0"/>
-              </a:spcBef>
-              <a:spcAft>
-                <a:spcPts val="0"/>
-              </a:spcAft>
-              <a:buClr>
-                <a:srgbClr val="1F2B5E"/>
-              </a:buClr>
-              <a:buSzPts val="1950"/>
-              <a:buFont typeface="Saira Condensed"/>
-              <a:buNone/>
-            </a:pPr>
-            <a:r>
-              <a:rPr b="1" i="0" lang="en-US" sz="1950" u="none" cap="none" strike="noStrike">
-                <a:solidFill>
-                  <a:srgbClr val="1F2B5E"/>
-                </a:solidFill>
-                <a:latin typeface="Saira Condensed"/>
-                <a:ea typeface="Saira Condensed"/>
-                <a:cs typeface="Saira Condensed"/>
-                <a:sym typeface="Saira Condensed"/>
-              </a:rPr>
-              <a:t>JESTEŚMY TAM, GDZIE SIĘ CZEKA</a:t>
-            </a:r>
-            <a:endParaRPr b="0" i="0" sz="1950" u="none" cap="none" strike="noStrike">
-              <a:solidFill>
-                <a:schemeClr val="dk1"/>
-              </a:solidFill>
-              <a:latin typeface="Calibri"/>
-              <a:ea typeface="Calibri"/>
-              <a:cs typeface="Calibri"/>
-              <a:sym typeface="Calibri"/>
-            </a:endParaRPr>
-          </a:p>
-        </p:txBody>
-      </p:sp>
-      <p:sp>
-        <p:nvSpPr>
-          <p:cNvPr id="67" name="Google Shape;67;p8"/>
-          <p:cNvSpPr/>
-          <p:nvPr/>
-        </p:nvSpPr>
-        <p:spPr>
-          <a:xfrm>
-            <a:off x="6838950" y="2413099"/>
-            <a:ext cx="1676400" cy="755700"/>
-          </a:xfrm>
-          <a:prstGeom prst="rect">
-            <a:avLst/>
-          </a:prstGeom>
-          <a:noFill/>
-          <a:ln>
-            <a:noFill/>
-          </a:ln>
-        </p:spPr>
-        <p:txBody>
-          <a:bodyPr anchorCtr="0" anchor="t" bIns="0" lIns="0" spcFirstLastPara="1" rIns="0" wrap="square" tIns="0">
-            <a:noAutofit/>
-          </a:bodyPr>
-          <a:lstStyle/>
-          <a:p>
-            <a:pPr indent="0" lvl="0" marL="0" marR="0" rtl="0" algn="l">
-              <a:lnSpc>
-                <a:spcPct val="107000"/>
-              </a:lnSpc>
-              <a:spcBef>
-                <a:spcPts val="0"/>
-              </a:spcBef>
-              <a:spcAft>
-                <a:spcPts val="0"/>
-              </a:spcAft>
-              <a:buClr>
-                <a:srgbClr val="1F2B5E"/>
-              </a:buClr>
-              <a:buSzPts val="1150"/>
-              <a:buFont typeface="Saira Condensed Medium"/>
-              <a:buNone/>
-            </a:pPr>
-            <a:r>
-              <a:rPr b="0" i="0" lang="en-US" sz="1150" u="none" cap="none" strike="noStrike">
-                <a:solidFill>
-                  <a:srgbClr val="1F2B5E"/>
-                </a:solidFill>
-                <a:latin typeface="Saira Condensed Medium"/>
-                <a:ea typeface="Saira Condensed Medium"/>
-                <a:cs typeface="Saira Condensed Medium"/>
-                <a:sym typeface="Saira Condensed Medium"/>
-              </a:rPr>
-              <a:t>Każda podróż komunikacją zaczyna się i kończy na przystanku. Tam jest czas, żeby przeczytać kartkę.</a:t>
-            </a:r>
-            <a:endParaRPr b="0" i="0" sz="1150" u="none" cap="none" strike="noStrike">
-              <a:solidFill>
-                <a:schemeClr val="dk1"/>
-              </a:solidFill>
-              <a:latin typeface="Calibri"/>
-              <a:ea typeface="Calibri"/>
-              <a:cs typeface="Calibri"/>
-              <a:sym typeface="Calibri"/>
-            </a:endParaRPr>
-          </a:p>
-        </p:txBody>
-      </p:sp>
-      <p:pic>
-        <p:nvPicPr>
-          <p:cNvPr id="68" name="Google Shape;68;p8"/>
-          <p:cNvPicPr preferRelativeResize="0"/>
-          <p:nvPr/>
-        </p:nvPicPr>
-        <p:blipFill>
-          <a:blip r:embed="rId3">
-            <a:alphaModFix/>
-          </a:blip>
-          <a:stretch>
-            <a:fillRect/>
-          </a:stretch>
-        </p:blipFill>
-        <p:spPr>
-          <a:xfrm>
-            <a:off x="142875" y="3440975"/>
-            <a:ext cx="2462675" cy="1628774"/>
-          </a:xfrm>
-          <a:prstGeom prst="rect">
-            <a:avLst/>
-          </a:prstGeom>
-          <a:noFill/>
-          <a:ln>
-            <a:noFill/>
-          </a:ln>
-        </p:spPr>
-      </p:pic>
-      <p:sp>
-        <p:nvSpPr>
-          <p:cNvPr id="69" name="Google Shape;69;p8"/>
-          <p:cNvSpPr/>
-          <p:nvPr/>
-        </p:nvSpPr>
-        <p:spPr>
-          <a:xfrm>
-            <a:off x="485775" y="3740275"/>
-            <a:ext cx="304800" cy="314400"/>
-          </a:xfrm>
-          <a:prstGeom prst="ellipse">
-            <a:avLst/>
-          </a:prstGeom>
-          <a:noFill/>
-          <a:ln cap="flat" cmpd="sng" w="38100">
-            <a:solidFill>
-              <a:srgbClr val="FF0000"/>
-            </a:solidFill>
-            <a:prstDash val="solid"/>
-            <a:round/>
-            <a:headEnd len="sm" w="sm" type="none"/>
-            <a:tailEnd len="sm" w="sm" type="none"/>
-          </a:ln>
-        </p:spPr>
-        <p:txBody>
-          <a:bodyPr anchorCtr="0" anchor="ctr" bIns="91425" lIns="91425" spcFirstLastPara="1" rIns="91425" wrap="square" tIns="91425">
-            <a:noAutofit/>
-          </a:bodyPr>
-          <a:lstStyle/>
-          <a:p>
-            <a:pPr indent="0" lvl="0" marL="0" rtl="0" algn="ctr">
-              <a:spcBef>
-                <a:spcPts val="0"/>
-              </a:spcBef>
-              <a:spcAft>
-                <a:spcPts val="0"/>
-              </a:spcAft>
-              <a:buNone/>
-            </a:pPr>
-            <a:r>
-              <a:t/>
-            </a:r>
-            <a:endParaRPr/>
-          </a:p>
-        </p:txBody>
-      </p:sp>
-      <p:pic>
-        <p:nvPicPr>
-          <p:cNvPr id="70" name="Google Shape;70;p8"/>
-          <p:cNvPicPr preferRelativeResize="0"/>
-          <p:nvPr/>
-        </p:nvPicPr>
-        <p:blipFill>
-          <a:blip r:embed="rId4">
-            <a:alphaModFix/>
-          </a:blip>
-          <a:stretch>
-            <a:fillRect/>
-          </a:stretch>
-        </p:blipFill>
-        <p:spPr>
-          <a:xfrm>
-            <a:off x="2695226" y="2413100"/>
-            <a:ext cx="1463437" cy="2656650"/>
-          </a:xfrm>
-          <a:prstGeom prst="rect">
-            <a:avLst/>
-          </a:prstGeom>
-          <a:noFill/>
-          <a:ln>
-            <a:noFill/>
-          </a:ln>
-        </p:spPr>
-      </p:pic>
-      <p:sp>
-        <p:nvSpPr>
-          <p:cNvPr id="71" name="Google Shape;71;p8"/>
-          <p:cNvSpPr/>
-          <p:nvPr/>
-        </p:nvSpPr>
-        <p:spPr>
-          <a:xfrm>
-            <a:off x="2977575" y="2571050"/>
-            <a:ext cx="1181100" cy="439800"/>
-          </a:xfrm>
-          <a:prstGeom prst="ellipse">
-            <a:avLst/>
-          </a:prstGeom>
-          <a:noFill/>
-          <a:ln cap="flat" cmpd="sng" w="76200">
-            <a:solidFill>
-              <a:srgbClr val="FF0000"/>
-            </a:solidFill>
-            <a:prstDash val="solid"/>
-            <a:round/>
-            <a:headEnd len="sm" w="sm" type="none"/>
-            <a:tailEnd len="sm" w="sm" type="none"/>
-          </a:ln>
-        </p:spPr>
-        <p:txBody>
-          <a:bodyPr anchorCtr="0" anchor="ctr" bIns="91425" lIns="91425" spcFirstLastPara="1" rIns="91425" wrap="square" tIns="91425">
-            <a:noAutofit/>
-          </a:bodyPr>
-          <a:lstStyle/>
-          <a:p>
-            <a:pPr indent="0" lvl="0" marL="0" rtl="0" algn="ctr">
-              <a:spcBef>
-                <a:spcPts val="0"/>
-              </a:spcBef>
-              <a:spcAft>
-                <a:spcPts val="0"/>
-              </a:spcAft>
-              <a:buNone/>
-            </a:pPr>
-            <a:r>
-              <a:t/>
-            </a:r>
-            <a:endParaRPr/>
-          </a:p>
-        </p:txBody>
-      </p:sp>
-      <p:pic>
-        <p:nvPicPr>
-          <p:cNvPr id="72" name="Google Shape;72;p8" title="Screenshot 2026-10-18 at 08.49.55.png"/>
-          <p:cNvPicPr preferRelativeResize="0"/>
-          <p:nvPr/>
-        </p:nvPicPr>
-        <p:blipFill rotWithShape="1">
-          <a:blip r:embed="rId5">
-            <a:alphaModFix/>
-          </a:blip>
-          <a:srcRect b="0" l="1549" r="382" t="0"/>
-          <a:stretch/>
-        </p:blipFill>
-        <p:spPr>
-          <a:xfrm>
-            <a:off x="130150" y="2198950"/>
-            <a:ext cx="2415050" cy="1184000"/>
-          </a:xfrm>
-          <a:prstGeom prst="rect">
-            <a:avLst/>
-          </a:prstGeom>
-          <a:noFill/>
-          <a:ln>
-            <a:noFill/>
-          </a:ln>
-        </p:spPr>
-      </p:pic>
-      <p:pic>
-        <p:nvPicPr>
-          <p:cNvPr id="73" name="Google Shape;73;p8" title="Screenshot 2026-10-18 at 08.51.57.png"/>
-          <p:cNvPicPr preferRelativeResize="0"/>
-          <p:nvPr/>
-        </p:nvPicPr>
-        <p:blipFill>
-          <a:blip r:embed="rId6">
-            <a:alphaModFix/>
-          </a:blip>
-          <a:stretch>
-            <a:fillRect/>
-          </a:stretch>
-        </p:blipFill>
-        <p:spPr>
-          <a:xfrm>
-            <a:off x="123825" y="93525"/>
-            <a:ext cx="4152901" cy="662700"/>
-          </a:xfrm>
-          <a:prstGeom prst="rect">
-            <a:avLst/>
-          </a:prstGeom>
-          <a:noFill/>
-          <a:ln>
-            <a:noFill/>
-          </a:ln>
-        </p:spPr>
-      </p:pic>
-      <p:pic>
-        <p:nvPicPr>
-          <p:cNvPr id="74" name="Google Shape;74;p8"/>
-          <p:cNvPicPr preferRelativeResize="0"/>
-          <p:nvPr/>
-        </p:nvPicPr>
-        <p:blipFill>
-          <a:blip r:embed="rId7">
-            <a:alphaModFix/>
-          </a:blip>
-          <a:stretch>
-            <a:fillRect/>
-          </a:stretch>
-        </p:blipFill>
-        <p:spPr>
-          <a:xfrm>
-            <a:off x="104775" y="814250"/>
-            <a:ext cx="3392493" cy="1326675"/>
           </a:xfrm>
           <a:prstGeom prst="rect">
             <a:avLst/>
@@ -8102,8 +8102,8 @@
         </p:blipFill>
         <p:spPr>
           <a:xfrm>
-            <a:off x="457200" y="2405360"/>
-            <a:ext cx="6346655" cy="1952340"/>
+            <a:off x="552450" y="2390775"/>
+            <a:ext cx="6267451" cy="2017825"/>
           </a:xfrm>
           <a:prstGeom prst="rect">
             <a:avLst/>
